--- a/Slides/individual-slides/_Vibe Coding.pptx
+++ b/Slides/individual-slides/_Vibe Coding.pptx
@@ -5,44 +5,31 @@
     <p:sldMasterId id="2147483648" r:id="rId1"/>
   </p:sldMasterIdLst>
   <p:notesMasterIdLst>
-    <p:notesMasterId r:id="rId37"/>
+    <p:notesMasterId r:id="rId24"/>
   </p:notesMasterIdLst>
   <p:sldIdLst>
     <p:sldId id="328" r:id="rId2"/>
     <p:sldId id="332" r:id="rId3"/>
-    <p:sldId id="323" r:id="rId4"/>
-    <p:sldId id="318" r:id="rId5"/>
-    <p:sldId id="333" r:id="rId6"/>
-    <p:sldId id="334" r:id="rId7"/>
-    <p:sldId id="335" r:id="rId8"/>
-    <p:sldId id="336" r:id="rId9"/>
-    <p:sldId id="337" r:id="rId10"/>
+    <p:sldId id="318" r:id="rId4"/>
+    <p:sldId id="333" r:id="rId5"/>
+    <p:sldId id="334" r:id="rId6"/>
+    <p:sldId id="335" r:id="rId7"/>
+    <p:sldId id="336" r:id="rId8"/>
+    <p:sldId id="337" r:id="rId9"/>
+    <p:sldId id="339" r:id="rId10"/>
     <p:sldId id="338" r:id="rId11"/>
-    <p:sldId id="339" r:id="rId12"/>
-    <p:sldId id="340" r:id="rId13"/>
-    <p:sldId id="329" r:id="rId14"/>
-    <p:sldId id="330" r:id="rId15"/>
-    <p:sldId id="331" r:id="rId16"/>
-    <p:sldId id="319" r:id="rId17"/>
-    <p:sldId id="320" r:id="rId18"/>
-    <p:sldId id="321" r:id="rId19"/>
-    <p:sldId id="322" r:id="rId20"/>
+    <p:sldId id="319" r:id="rId12"/>
+    <p:sldId id="320" r:id="rId13"/>
+    <p:sldId id="321" r:id="rId14"/>
+    <p:sldId id="322" r:id="rId15"/>
+    <p:sldId id="323" r:id="rId16"/>
+    <p:sldId id="340" r:id="rId17"/>
+    <p:sldId id="329" r:id="rId18"/>
+    <p:sldId id="330" r:id="rId19"/>
+    <p:sldId id="331" r:id="rId20"/>
     <p:sldId id="359" r:id="rId21"/>
     <p:sldId id="266" r:id="rId22"/>
     <p:sldId id="342" r:id="rId23"/>
-    <p:sldId id="2141411863" r:id="rId24"/>
-    <p:sldId id="2141411864" r:id="rId25"/>
-    <p:sldId id="2141411865" r:id="rId26"/>
-    <p:sldId id="2141411866" r:id="rId27"/>
-    <p:sldId id="2141411867" r:id="rId28"/>
-    <p:sldId id="2141411868" r:id="rId29"/>
-    <p:sldId id="2141411872" r:id="rId30"/>
-    <p:sldId id="2141411874" r:id="rId31"/>
-    <p:sldId id="2141411875" r:id="rId32"/>
-    <p:sldId id="2141411876" r:id="rId33"/>
-    <p:sldId id="2141411877" r:id="rId34"/>
-    <p:sldId id="2141411878" r:id="rId35"/>
-    <p:sldId id="2141411879" r:id="rId36"/>
   </p:sldIdLst>
   <p:sldSz cx="12192000" cy="6858000"/>
   <p:notesSz cx="6858000" cy="9144000"/>
@@ -151,42 +138,32 @@
           <p14:sldIdLst>
             <p14:sldId id="328"/>
             <p14:sldId id="332"/>
-            <p14:sldId id="323"/>
             <p14:sldId id="318"/>
             <p14:sldId id="333"/>
             <p14:sldId id="334"/>
             <p14:sldId id="335"/>
             <p14:sldId id="336"/>
             <p14:sldId id="337"/>
+            <p14:sldId id="339"/>
             <p14:sldId id="338"/>
-            <p14:sldId id="339"/>
+            <p14:sldId id="319"/>
+            <p14:sldId id="320"/>
+            <p14:sldId id="321"/>
+            <p14:sldId id="322"/>
+            <p14:sldId id="323"/>
             <p14:sldId id="340"/>
             <p14:sldId id="329"/>
             <p14:sldId id="330"/>
             <p14:sldId id="331"/>
-            <p14:sldId id="319"/>
-            <p14:sldId id="320"/>
-            <p14:sldId id="321"/>
-            <p14:sldId id="322"/>
             <p14:sldId id="359"/>
             <p14:sldId id="266"/>
             <p14:sldId id="342"/>
-            <p14:sldId id="2141411863"/>
-            <p14:sldId id="2141411864"/>
-            <p14:sldId id="2141411865"/>
-            <p14:sldId id="2141411866"/>
-            <p14:sldId id="2141411867"/>
-            <p14:sldId id="2141411868"/>
-            <p14:sldId id="2141411872"/>
-            <p14:sldId id="2141411874"/>
-            <p14:sldId id="2141411875"/>
-            <p14:sldId id="2141411876"/>
-            <p14:sldId id="2141411877"/>
-            <p14:sldId id="2141411878"/>
-            <p14:sldId id="2141411879"/>
           </p14:sldIdLst>
         </p14:section>
       </p14:sectionLst>
+    </p:ext>
+    <p:ext uri="{EFAFB233-063F-42B5-8137-9DF3F51BA10A}">
+      <p15:sldGuideLst xmlns:p15="http://schemas.microsoft.com/office/powerpoint/2012/main"/>
     </p:ext>
   </p:extLst>
 </p:presentation>
@@ -4604,13 +4581,7 @@
   <p:cSld>
     <p:spTree>
       <p:nvGrpSpPr>
-        <p:cNvPr id="1" name="">
-          <a:extLst>
-            <a:ext uri="{FF2B5EF4-FFF2-40B4-BE49-F238E27FC236}">
-              <a16:creationId xmlns:a16="http://schemas.microsoft.com/office/drawing/2014/main" id="{B0CB07D7-96D7-6DFB-9862-570F8D7DDF0D}"/>
-            </a:ext>
-          </a:extLst>
-        </p:cNvPr>
+        <p:cNvPr id="1" name=""/>
         <p:cNvGrpSpPr/>
         <p:nvPr/>
       </p:nvGrpSpPr>
@@ -4627,7 +4598,7 @@
           <p:cNvPr id="2" name="Title 1">
             <a:extLst>
               <a:ext uri="{FF2B5EF4-FFF2-40B4-BE49-F238E27FC236}">
-                <a16:creationId xmlns:a16="http://schemas.microsoft.com/office/drawing/2014/main" id="{80F6FBCD-8460-327A-453B-23ED964EE34F}"/>
+                <a16:creationId xmlns:a16="http://schemas.microsoft.com/office/drawing/2014/main" id="{DF27F4DA-D2F8-4B60-9DE3-301DB8D6794A}"/>
               </a:ext>
             </a:extLst>
           </p:cNvPr>
@@ -4646,8 +4617,8 @@
           <a:lstStyle/>
           <a:p>
             <a:r>
-              <a:rPr lang="en-US" sz="2400" dirty="0"/>
-              <a:t>Exercise: Calculator Project – Add Trigonometric Functions </a:t>
+              <a:rPr lang="en-US" sz="3733" dirty="0"/>
+              <a:t>Exercise: Calculator Project - Testing</a:t>
             </a:r>
           </a:p>
         </p:txBody>
@@ -4657,7 +4628,7 @@
           <p:cNvPr id="3" name="Content Placeholder 2">
             <a:extLst>
               <a:ext uri="{FF2B5EF4-FFF2-40B4-BE49-F238E27FC236}">
-                <a16:creationId xmlns:a16="http://schemas.microsoft.com/office/drawing/2014/main" id="{27F32117-34FF-0A09-5AA2-44249A520062}"/>
+                <a16:creationId xmlns:a16="http://schemas.microsoft.com/office/drawing/2014/main" id="{7B7DCA1F-EBDC-7D8A-2582-15B2BE8B5E58}"/>
               </a:ext>
             </a:extLst>
           </p:cNvPr>
@@ -4671,7 +4642,7 @@
         <p:spPr/>
         <p:txBody>
           <a:bodyPr numCol="2">
-            <a:normAutofit fontScale="70000" lnSpcReduction="20000"/>
+            <a:normAutofit fontScale="55000" lnSpcReduction="20000"/>
           </a:bodyPr>
           <a:lstStyle/>
           <a:p>
@@ -4680,17 +4651,21 @@
             </a:pPr>
             <a:r>
               <a:rPr lang="en-US" b="1" dirty="0"/>
-              <a:t>Duration: 15 minutes</a:t>
-            </a:r>
-            <a:endParaRPr lang="en-US" dirty="0"/>
-          </a:p>
-          <a:p>
-            <a:pPr marL="0" indent="0">
-              <a:buNone/>
-            </a:pPr>
-            <a:br>
-              <a:rPr lang="en-US" b="1" dirty="0"/>
-            </a:br>
+              <a:t>Duration:</a:t>
+            </a:r>
+            <a:r>
+              <a:rPr lang="en-US" dirty="0"/>
+              <a:t> 45-60 minutes</a:t>
+            </a:r>
+            <a:br>
+              <a:rPr lang="en-US" dirty="0"/>
+            </a:br>
+            <a:endParaRPr lang="en-US" dirty="0"/>
+          </a:p>
+          <a:p>
+            <a:pPr marL="0" indent="0">
+              <a:buNone/>
+            </a:pPr>
             <a:r>
               <a:rPr lang="en-US" b="1" dirty="0"/>
               <a:t>Objectives</a:t>
@@ -4704,30 +4679,31 @@
             <a:pPr lvl="1"/>
             <a:r>
               <a:rPr lang="en-US" dirty="0"/>
-              <a:t>Integrate trigonometric functions into the calculator’s operation set</a:t>
-            </a:r>
-          </a:p>
-          <a:p>
-            <a:pPr lvl="1"/>
-            <a:r>
-              <a:rPr lang="en-US" dirty="0"/>
-              <a:t>Use AI to generate math‑library wrappers and input‑parsing logic</a:t>
-            </a:r>
-          </a:p>
-          <a:p>
-            <a:pPr lvl="1"/>
-            <a:r>
-              <a:rPr lang="en-US" dirty="0"/>
-              <a:t>Ensure correct handling of degrees vs. radians</a:t>
-            </a:r>
-          </a:p>
-          <a:p>
-            <a:pPr marL="0" indent="0">
-              <a:buNone/>
-            </a:pPr>
-            <a:br>
-              <a:rPr lang="en-US" dirty="0"/>
-            </a:br>
+              <a:t>Generate unit tests with AI assistance</a:t>
+            </a:r>
+          </a:p>
+          <a:p>
+            <a:pPr lvl="1"/>
+            <a:r>
+              <a:rPr lang="en-US" dirty="0"/>
+              <a:t>Identify quality issues in generated tests</a:t>
+            </a:r>
+          </a:p>
+          <a:p>
+            <a:pPr lvl="1"/>
+            <a:r>
+              <a:rPr lang="en-US" dirty="0"/>
+              <a:t>Understand the importance of reviewing AI-generated tests</a:t>
+            </a:r>
+            <a:br>
+              <a:rPr lang="en-US" dirty="0"/>
+            </a:br>
+            <a:endParaRPr lang="en-US" dirty="0"/>
+          </a:p>
+          <a:p>
+            <a:pPr marL="0" indent="0">
+              <a:buNone/>
+            </a:pPr>
             <a:r>
               <a:rPr lang="en-US" b="1" dirty="0"/>
               <a:t>Activities</a:t>
@@ -4738,45 +4714,168 @@
             <a:endParaRPr lang="en-US" dirty="0"/>
           </a:p>
           <a:p>
-            <a:pPr marL="609585" indent="-609585">
-              <a:buAutoNum type="arabicPeriod"/>
-            </a:pPr>
-            <a:r>
-              <a:rPr lang="en-US" dirty="0"/>
-              <a:t>Ask AI to generate functions for sin, cos, and tan using your language’s math library</a:t>
-            </a:r>
-          </a:p>
-          <a:p>
-            <a:pPr marL="609585" indent="-609585">
-              <a:buAutoNum type="arabicPeriod"/>
-            </a:pPr>
-            <a:r>
-              <a:rPr lang="en-US" dirty="0"/>
-              <a:t>Prompt AI to propose a strategy for handling degree/radian mode</a:t>
-            </a:r>
-          </a:p>
-          <a:p>
-            <a:pPr marL="609585" indent="-609585">
-              <a:buAutoNum type="arabicPeriod"/>
-            </a:pPr>
-            <a:r>
-              <a:rPr lang="en-US" dirty="0"/>
-              <a:t>Implement UI bindings or command triggers for each trig function</a:t>
-            </a:r>
-          </a:p>
-          <a:p>
-            <a:pPr marL="609585" indent="-609585">
-              <a:buAutoNum type="arabicPeriod"/>
-            </a:pPr>
-            <a:r>
-              <a:rPr lang="en-US" dirty="0"/>
-              <a:t>Use AI to generate a table of sample inputs and expected outputs</a:t>
-            </a:r>
-          </a:p>
-          <a:p>
-            <a:pPr marL="457189" lvl="1" indent="0">
-              <a:buNone/>
-            </a:pPr>
+            <a:pPr marL="0" indent="0">
+              <a:buNone/>
+            </a:pPr>
+            <a:r>
+              <a:rPr lang="en-US" dirty="0"/>
+              <a:t>1. </a:t>
+            </a:r>
+            <a:r>
+              <a:rPr lang="en-US" b="1" dirty="0"/>
+              <a:t>Generate Initial Tests:</a:t>
+            </a:r>
+            <a:br>
+              <a:rPr lang="en-US" dirty="0"/>
+            </a:br>
+            <a:endParaRPr lang="en-US" dirty="0"/>
+          </a:p>
+          <a:p>
+            <a:pPr lvl="1"/>
+            <a:r>
+              <a:rPr lang="en-US" dirty="0"/>
+              <a:t>Prompt: "Create unit tests for the calculator operations"</a:t>
+            </a:r>
+          </a:p>
+          <a:p>
+            <a:pPr lvl="1"/>
+            <a:r>
+              <a:rPr lang="en-US" dirty="0"/>
+              <a:t>Review generated test structure</a:t>
+            </a:r>
+          </a:p>
+          <a:p>
+            <a:pPr lvl="1"/>
+            <a:r>
+              <a:rPr lang="en-US" b="1" dirty="0"/>
+              <a:t>Critical Review:</a:t>
+            </a:r>
+            <a:r>
+              <a:rPr lang="en-US" dirty="0"/>
+              <a:t> Are tests calling your calculator code?</a:t>
+            </a:r>
+            <a:br>
+              <a:rPr lang="en-US" dirty="0"/>
+            </a:br>
+            <a:endParaRPr lang="en-US" dirty="0"/>
+          </a:p>
+          <a:p>
+            <a:pPr marL="0" indent="0">
+              <a:buNone/>
+            </a:pPr>
+            <a:r>
+              <a:rPr lang="en-US" dirty="0"/>
+              <a:t>2. </a:t>
+            </a:r>
+            <a:r>
+              <a:rPr lang="en-US" b="1" dirty="0"/>
+              <a:t>Fix Test Issues (Replicating Session Demo):</a:t>
+            </a:r>
+            <a:br>
+              <a:rPr lang="en-US" dirty="0"/>
+            </a:br>
+            <a:endParaRPr lang="en-US" dirty="0"/>
+          </a:p>
+          <a:p>
+            <a:pPr lvl="1"/>
+            <a:r>
+              <a:rPr lang="en-US" dirty="0"/>
+              <a:t>If tests are too simple (like `1 + 1 = 2` without calling calculator):</a:t>
+            </a:r>
+          </a:p>
+          <a:p>
+            <a:pPr lvl="1"/>
+            <a:r>
+              <a:rPr lang="en-US" dirty="0"/>
+              <a:t>Identify the problem</a:t>
+            </a:r>
+          </a:p>
+          <a:p>
+            <a:pPr lvl="1"/>
+            <a:r>
+              <a:rPr lang="en-US" dirty="0"/>
+              <a:t>Ask Copilot to fix it: "Update tests to call Calculator class methods"</a:t>
+            </a:r>
+          </a:p>
+          <a:p>
+            <a:pPr lvl="1"/>
+            <a:r>
+              <a:rPr lang="en-US" dirty="0"/>
+              <a:t>Verify tests now test actual implementation</a:t>
+            </a:r>
+            <a:br>
+              <a:rPr lang="en-US" dirty="0"/>
+            </a:br>
+            <a:endParaRPr lang="en-US" dirty="0"/>
+          </a:p>
+          <a:p>
+            <a:pPr marL="0" indent="0">
+              <a:buNone/>
+            </a:pPr>
+            <a:r>
+              <a:rPr lang="en-US" dirty="0"/>
+              <a:t>3. </a:t>
+            </a:r>
+            <a:r>
+              <a:rPr lang="en-US" b="1" dirty="0"/>
+              <a:t>Run Tests:</a:t>
+            </a:r>
+            <a:br>
+              <a:rPr lang="en-US" dirty="0"/>
+            </a:br>
+            <a:endParaRPr lang="en-US" dirty="0"/>
+          </a:p>
+          <a:p>
+            <a:pPr lvl="1"/>
+            <a:r>
+              <a:rPr lang="en-US" dirty="0"/>
+              <a:t>Execute test suite</a:t>
+            </a:r>
+          </a:p>
+          <a:p>
+            <a:pPr lvl="1"/>
+            <a:r>
+              <a:rPr lang="en-US" dirty="0"/>
+              <a:t>Review test output</a:t>
+            </a:r>
+          </a:p>
+          <a:p>
+            <a:pPr lvl="1"/>
+            <a:r>
+              <a:rPr lang="en-US" dirty="0"/>
+              <a:t>Debug any failing tests with Copilot's help</a:t>
+            </a:r>
+          </a:p>
+          <a:p>
+            <a:pPr marL="0" indent="0">
+              <a:buNone/>
+            </a:pPr>
+            <a:r>
+              <a:rPr lang="en-US" dirty="0"/>
+              <a:t>4. </a:t>
+            </a:r>
+            <a:r>
+              <a:rPr lang="en-US" b="1" dirty="0"/>
+              <a:t>Add Edge Cases:</a:t>
+            </a:r>
+            <a:endParaRPr lang="en-US" dirty="0"/>
+          </a:p>
+          <a:p>
+            <a:pPr lvl="1"/>
+            <a:r>
+              <a:rPr lang="en-US" dirty="0"/>
+              <a:t>Prompt: "Add tests for edge cases like division by zero"</a:t>
+            </a:r>
+          </a:p>
+          <a:p>
+            <a:pPr lvl="1"/>
+            <a:r>
+              <a:rPr lang="en-US" dirty="0"/>
+              <a:t>Verify exception handling tests are correct</a:t>
+            </a:r>
+            <a:br>
+              <a:rPr lang="en-US" dirty="0"/>
+            </a:br>
             <a:endParaRPr lang="en-US" dirty="0"/>
           </a:p>
           <a:p>
@@ -4787,40 +4886,41 @@
               <a:rPr lang="en-US" b="1" dirty="0"/>
               <a:t>Success Criteria</a:t>
             </a:r>
-            <a:endParaRPr lang="en-US" dirty="0"/>
-          </a:p>
-          <a:p>
-            <a:pPr lvl="1"/>
-            <a:r>
-              <a:rPr lang="en-US" dirty="0"/>
-              <a:t>Trig functions compute correct values in the selected angle mode</a:t>
-            </a:r>
-          </a:p>
-          <a:p>
-            <a:pPr lvl="1"/>
-            <a:r>
-              <a:rPr lang="en-US" dirty="0"/>
-              <a:t>Degree/radian mode switching works consistently</a:t>
-            </a:r>
-          </a:p>
-          <a:p>
-            <a:pPr lvl="1"/>
-            <a:r>
-              <a:rPr lang="en-US" dirty="0"/>
-              <a:t>UI or command triggers correctly call the trig functions</a:t>
-            </a:r>
-          </a:p>
-          <a:p>
-            <a:pPr lvl="1"/>
-            <a:r>
-              <a:rPr lang="en-US" dirty="0"/>
-              <a:t>Learner can explain how AI‑generated code was validated and refine</a:t>
-            </a:r>
-          </a:p>
-          <a:p>
-            <a:pPr marL="0" indent="0">
-              <a:buNone/>
-            </a:pPr>
+            <a:br>
+              <a:rPr lang="en-US" dirty="0"/>
+            </a:br>
+            <a:endParaRPr lang="en-US" dirty="0"/>
+          </a:p>
+          <a:p>
+            <a:pPr lvl="1"/>
+            <a:r>
+              <a:rPr lang="en-US" dirty="0"/>
+              <a:t>Test suite with minimum 8 test cases</a:t>
+            </a:r>
+          </a:p>
+          <a:p>
+            <a:pPr lvl="1"/>
+            <a:r>
+              <a:rPr lang="en-US" dirty="0"/>
+              <a:t>All tests call actual calculator methods (not just language arithmetic)</a:t>
+            </a:r>
+          </a:p>
+          <a:p>
+            <a:pPr lvl="1"/>
+            <a:r>
+              <a:rPr lang="en-US" dirty="0"/>
+              <a:t>Tests include edge cases and error conditions</a:t>
+            </a:r>
+          </a:p>
+          <a:p>
+            <a:pPr lvl="1"/>
+            <a:r>
+              <a:rPr lang="en-US" dirty="0"/>
+              <a:t>All tests pass</a:t>
+            </a:r>
+            <a:br>
+              <a:rPr lang="en-US" dirty="0"/>
+            </a:br>
             <a:endParaRPr lang="en-US" dirty="0"/>
           </a:p>
         </p:txBody>
@@ -4828,7 +4928,7 @@
     </p:spTree>
     <p:extLst>
       <p:ext uri="{BB962C8B-B14F-4D97-AF65-F5344CB8AC3E}">
-        <p14:creationId xmlns:p14="http://schemas.microsoft.com/office/powerpoint/2010/main" val="1899882474"/>
+        <p14:creationId xmlns:p14="http://schemas.microsoft.com/office/powerpoint/2010/main" val="3520810844"/>
       </p:ext>
     </p:extLst>
   </p:cSld>
@@ -4839,6 +4939,1427 @@
 </file>
 
 <file path=ppt/slides/slide12.xml><?xml version="1.0" encoding="utf-8"?>
+<p:sld xmlns:a="http://schemas.openxmlformats.org/drawingml/2006/main" xmlns:r="http://schemas.openxmlformats.org/officeDocument/2006/relationships" xmlns:p="http://schemas.openxmlformats.org/presentationml/2006/main">
+  <p:cSld>
+    <p:spTree>
+      <p:nvGrpSpPr>
+        <p:cNvPr id="1" name=""/>
+        <p:cNvGrpSpPr/>
+        <p:nvPr/>
+      </p:nvGrpSpPr>
+      <p:grpSpPr>
+        <a:xfrm>
+          <a:off x="0" y="0"/>
+          <a:ext cx="0" cy="0"/>
+          <a:chOff x="0" y="0"/>
+          <a:chExt cx="0" cy="0"/>
+        </a:xfrm>
+      </p:grpSpPr>
+      <p:sp>
+        <p:nvSpPr>
+          <p:cNvPr id="2" name="Title 1">
+            <a:extLst>
+              <a:ext uri="{FF2B5EF4-FFF2-40B4-BE49-F238E27FC236}">
+                <a16:creationId xmlns:a16="http://schemas.microsoft.com/office/drawing/2014/main" id="{BF7ADD32-5416-0192-2BE8-652D8E449EAB}"/>
+              </a:ext>
+            </a:extLst>
+          </p:cNvPr>
+          <p:cNvSpPr>
+            <a:spLocks noGrp="1"/>
+          </p:cNvSpPr>
+          <p:nvPr>
+            <p:ph type="title"/>
+          </p:nvPr>
+        </p:nvSpPr>
+        <p:spPr/>
+        <p:txBody>
+          <a:bodyPr>
+            <a:normAutofit/>
+          </a:bodyPr>
+          <a:lstStyle/>
+          <a:p>
+            <a:r>
+              <a:rPr lang="en-US" b="0" dirty="0"/>
+              <a:t>Exercise: Code Coverage</a:t>
+            </a:r>
+          </a:p>
+        </p:txBody>
+      </p:sp>
+      <p:sp>
+        <p:nvSpPr>
+          <p:cNvPr id="3" name="Content Placeholder 2">
+            <a:extLst>
+              <a:ext uri="{FF2B5EF4-FFF2-40B4-BE49-F238E27FC236}">
+                <a16:creationId xmlns:a16="http://schemas.microsoft.com/office/drawing/2014/main" id="{13D595A6-0F81-9AB3-F4B8-F6F0EDD923EF}"/>
+              </a:ext>
+            </a:extLst>
+          </p:cNvPr>
+          <p:cNvSpPr>
+            <a:spLocks noGrp="1"/>
+          </p:cNvSpPr>
+          <p:nvPr>
+            <p:ph idx="1"/>
+          </p:nvPr>
+        </p:nvSpPr>
+        <p:spPr/>
+        <p:txBody>
+          <a:bodyPr numCol="2">
+            <a:normAutofit fontScale="55000" lnSpcReduction="20000"/>
+          </a:bodyPr>
+          <a:lstStyle/>
+          <a:p>
+            <a:pPr marL="0" indent="0">
+              <a:buNone/>
+            </a:pPr>
+            <a:r>
+              <a:rPr lang="en-US" b="1" dirty="0"/>
+              <a:t>Duration:</a:t>
+            </a:r>
+            <a:r>
+              <a:rPr lang="en-US" dirty="0"/>
+              <a:t> 30-40 minutes</a:t>
+            </a:r>
+          </a:p>
+          <a:p>
+            <a:pPr marL="0" indent="0">
+              <a:buNone/>
+            </a:pPr>
+            <a:r>
+              <a:rPr lang="en-US" b="1" dirty="0"/>
+              <a:t>Objectives</a:t>
+            </a:r>
+            <a:br>
+              <a:rPr lang="en-US" dirty="0"/>
+            </a:br>
+            <a:endParaRPr lang="en-US" dirty="0"/>
+          </a:p>
+          <a:p>
+            <a:pPr lvl="1"/>
+            <a:r>
+              <a:rPr lang="en-US" dirty="0"/>
+              <a:t>Set up code coverage reporting</a:t>
+            </a:r>
+          </a:p>
+          <a:p>
+            <a:pPr lvl="1"/>
+            <a:r>
+              <a:rPr lang="en-US" dirty="0"/>
+              <a:t>Interpret coverage results</a:t>
+            </a:r>
+          </a:p>
+          <a:p>
+            <a:pPr lvl="1"/>
+            <a:r>
+              <a:rPr lang="en-US" dirty="0"/>
+              <a:t>Improve test coverage based on gaps</a:t>
+            </a:r>
+            <a:br>
+              <a:rPr lang="en-US" dirty="0"/>
+            </a:br>
+            <a:endParaRPr lang="en-US" dirty="0"/>
+          </a:p>
+          <a:p>
+            <a:pPr marL="0" indent="0">
+              <a:buNone/>
+            </a:pPr>
+            <a:r>
+              <a:rPr lang="en-US" b="1" dirty="0"/>
+              <a:t>Activities</a:t>
+            </a:r>
+            <a:br>
+              <a:rPr lang="en-US" dirty="0"/>
+            </a:br>
+            <a:endParaRPr lang="en-US" dirty="0"/>
+          </a:p>
+          <a:p>
+            <a:pPr marL="0" indent="0">
+              <a:buNone/>
+            </a:pPr>
+            <a:r>
+              <a:rPr lang="en-US" dirty="0"/>
+              <a:t>1. </a:t>
+            </a:r>
+            <a:r>
+              <a:rPr lang="en-US" b="1" dirty="0"/>
+              <a:t>Enable Coverage Collection:</a:t>
+            </a:r>
+            <a:br>
+              <a:rPr lang="en-US" dirty="0"/>
+            </a:br>
+            <a:endParaRPr lang="en-US" dirty="0"/>
+          </a:p>
+          <a:p>
+            <a:pPr lvl="1"/>
+            <a:r>
+              <a:rPr lang="en-US" dirty="0"/>
+              <a:t>Prompt: "Add code coverage reporting to my test project"</a:t>
+            </a:r>
+          </a:p>
+          <a:p>
+            <a:pPr lvl="1"/>
+            <a:r>
+              <a:rPr lang="en-US" dirty="0"/>
+              <a:t>Review package dependencies added</a:t>
+            </a:r>
+          </a:p>
+          <a:p>
+            <a:pPr lvl="1"/>
+            <a:r>
+              <a:rPr lang="en-US" dirty="0"/>
+              <a:t>Handle any NuGet/dependency issues with Copilot's help</a:t>
+            </a:r>
+            <a:br>
+              <a:rPr lang="en-US" dirty="0"/>
+            </a:br>
+            <a:endParaRPr lang="en-US" dirty="0"/>
+          </a:p>
+          <a:p>
+            <a:pPr marL="0" indent="0">
+              <a:buNone/>
+            </a:pPr>
+            <a:r>
+              <a:rPr lang="en-US" dirty="0"/>
+              <a:t>2. </a:t>
+            </a:r>
+            <a:r>
+              <a:rPr lang="en-US" b="1" dirty="0"/>
+              <a:t>Generate Coverage Report:</a:t>
+            </a:r>
+            <a:br>
+              <a:rPr lang="en-US" dirty="0"/>
+            </a:br>
+            <a:endParaRPr lang="en-US" dirty="0"/>
+          </a:p>
+          <a:p>
+            <a:pPr lvl="1"/>
+            <a:r>
+              <a:rPr lang="en-US" dirty="0"/>
+              <a:t>Run tests with coverage enabled</a:t>
+            </a:r>
+          </a:p>
+          <a:p>
+            <a:pPr lvl="1"/>
+            <a:r>
+              <a:rPr lang="en-US" dirty="0"/>
+              <a:t>Review coverage percentage</a:t>
+            </a:r>
+          </a:p>
+          <a:p>
+            <a:pPr lvl="1"/>
+            <a:r>
+              <a:rPr lang="en-US" dirty="0"/>
+              <a:t>Identify uncovered code paths</a:t>
+            </a:r>
+            <a:br>
+              <a:rPr lang="en-US" dirty="0"/>
+            </a:br>
+            <a:endParaRPr lang="en-US" dirty="0"/>
+          </a:p>
+          <a:p>
+            <a:pPr marL="0" indent="0">
+              <a:buNone/>
+            </a:pPr>
+            <a:r>
+              <a:rPr lang="en-US" dirty="0"/>
+              <a:t>3. </a:t>
+            </a:r>
+            <a:r>
+              <a:rPr lang="en-US" b="1" dirty="0"/>
+              <a:t>Improve Coverage:</a:t>
+            </a:r>
+            <a:br>
+              <a:rPr lang="en-US" b="1" dirty="0"/>
+            </a:br>
+            <a:endParaRPr lang="en-US" dirty="0"/>
+          </a:p>
+          <a:p>
+            <a:pPr lvl="1"/>
+            <a:r>
+              <a:rPr lang="en-US" dirty="0"/>
+              <a:t>Add tests for uncovered methods</a:t>
+            </a:r>
+          </a:p>
+          <a:p>
+            <a:pPr lvl="1"/>
+            <a:r>
+              <a:rPr lang="en-US" dirty="0"/>
+              <a:t>Re-run coverage to verify improvement</a:t>
+            </a:r>
+          </a:p>
+          <a:p>
+            <a:pPr lvl="1"/>
+            <a:r>
+              <a:rPr lang="en-US" dirty="0"/>
+              <a:t>Discuss: Is 100% coverage always necessary?</a:t>
+            </a:r>
+            <a:br>
+              <a:rPr lang="en-US" dirty="0"/>
+            </a:br>
+            <a:endParaRPr lang="en-US" dirty="0"/>
+          </a:p>
+          <a:p>
+            <a:pPr marL="0" indent="0">
+              <a:buNone/>
+            </a:pPr>
+            <a:r>
+              <a:rPr lang="en-US" b="1" dirty="0"/>
+              <a:t>Success Criteria</a:t>
+            </a:r>
+            <a:br>
+              <a:rPr lang="en-US" dirty="0"/>
+            </a:br>
+            <a:endParaRPr lang="en-US" dirty="0"/>
+          </a:p>
+          <a:p>
+            <a:pPr lvl="1"/>
+            <a:r>
+              <a:rPr lang="en-US" dirty="0"/>
+              <a:t>Code coverage reporting successfully configured</a:t>
+            </a:r>
+          </a:p>
+          <a:p>
+            <a:pPr lvl="1"/>
+            <a:r>
+              <a:rPr lang="en-US" dirty="0"/>
+              <a:t>Can generate and read coverage reports</a:t>
+            </a:r>
+          </a:p>
+          <a:p>
+            <a:pPr lvl="1"/>
+            <a:r>
+              <a:rPr lang="en-US" dirty="0"/>
+              <a:t>Achieved reasonable coverage (&gt;80% line coverage)</a:t>
+            </a:r>
+          </a:p>
+          <a:p>
+            <a:pPr lvl="1"/>
+            <a:r>
+              <a:rPr lang="en-US" dirty="0"/>
+              <a:t>Understand what coverage metrics mean</a:t>
+            </a:r>
+            <a:br>
+              <a:rPr lang="en-US" dirty="0"/>
+            </a:br>
+            <a:endParaRPr lang="en-US" dirty="0"/>
+          </a:p>
+          <a:p>
+            <a:pPr marL="0" indent="0">
+              <a:buNone/>
+            </a:pPr>
+            <a:r>
+              <a:rPr lang="en-US" b="1" dirty="0"/>
+              <a:t>Discussion Points</a:t>
+            </a:r>
+            <a:br>
+              <a:rPr lang="en-US" dirty="0"/>
+            </a:br>
+            <a:endParaRPr lang="en-US" dirty="0"/>
+          </a:p>
+          <a:p>
+            <a:pPr lvl="1"/>
+            <a:r>
+              <a:rPr lang="en-US" dirty="0"/>
+              <a:t>Feature coverage vs. code coverage (as raised by Tom in the session)</a:t>
+            </a:r>
+          </a:p>
+          <a:p>
+            <a:pPr lvl="1"/>
+            <a:r>
+              <a:rPr lang="en-US" dirty="0"/>
+              <a:t>When is test coverage sufficient?</a:t>
+            </a:r>
+          </a:p>
+          <a:p>
+            <a:pPr lvl="1"/>
+            <a:r>
+              <a:rPr lang="en-US" dirty="0"/>
+              <a:t>Quality of tests vs. quantity</a:t>
+            </a:r>
+          </a:p>
+        </p:txBody>
+      </p:sp>
+    </p:spTree>
+    <p:extLst>
+      <p:ext uri="{BB962C8B-B14F-4D97-AF65-F5344CB8AC3E}">
+        <p14:creationId xmlns:p14="http://schemas.microsoft.com/office/powerpoint/2010/main" val="3773342207"/>
+      </p:ext>
+    </p:extLst>
+  </p:cSld>
+  <p:clrMapOvr>
+    <a:masterClrMapping/>
+  </p:clrMapOvr>
+</p:sld>
+</file>
+
+<file path=ppt/slides/slide13.xml><?xml version="1.0" encoding="utf-8"?>
+<p:sld xmlns:a="http://schemas.openxmlformats.org/drawingml/2006/main" xmlns:r="http://schemas.openxmlformats.org/officeDocument/2006/relationships" xmlns:p="http://schemas.openxmlformats.org/presentationml/2006/main">
+  <p:cSld>
+    <p:spTree>
+      <p:nvGrpSpPr>
+        <p:cNvPr id="1" name=""/>
+        <p:cNvGrpSpPr/>
+        <p:nvPr/>
+      </p:nvGrpSpPr>
+      <p:grpSpPr>
+        <a:xfrm>
+          <a:off x="0" y="0"/>
+          <a:ext cx="0" cy="0"/>
+          <a:chOff x="0" y="0"/>
+          <a:chExt cx="0" cy="0"/>
+        </a:xfrm>
+      </p:grpSpPr>
+      <p:sp>
+        <p:nvSpPr>
+          <p:cNvPr id="2" name="Title 1">
+            <a:extLst>
+              <a:ext uri="{FF2B5EF4-FFF2-40B4-BE49-F238E27FC236}">
+                <a16:creationId xmlns:a16="http://schemas.microsoft.com/office/drawing/2014/main" id="{13DA5C8B-D3E3-71D7-A402-CA01FF5C0C63}"/>
+              </a:ext>
+            </a:extLst>
+          </p:cNvPr>
+          <p:cNvSpPr>
+            <a:spLocks noGrp="1"/>
+          </p:cNvSpPr>
+          <p:nvPr>
+            <p:ph type="title"/>
+          </p:nvPr>
+        </p:nvSpPr>
+        <p:spPr/>
+        <p:txBody>
+          <a:bodyPr>
+            <a:noAutofit/>
+          </a:bodyPr>
+          <a:lstStyle/>
+          <a:p>
+            <a:r>
+              <a:rPr lang="en-US" sz="2400" dirty="0"/>
+              <a:t>Exercise: Dependency Management &amp; Troubleshooting</a:t>
+            </a:r>
+          </a:p>
+        </p:txBody>
+      </p:sp>
+      <p:sp>
+        <p:nvSpPr>
+          <p:cNvPr id="3" name="Content Placeholder 2">
+            <a:extLst>
+              <a:ext uri="{FF2B5EF4-FFF2-40B4-BE49-F238E27FC236}">
+                <a16:creationId xmlns:a16="http://schemas.microsoft.com/office/drawing/2014/main" id="{5AB9ABBA-D52B-ABC8-3782-CACA185F2E8C}"/>
+              </a:ext>
+            </a:extLst>
+          </p:cNvPr>
+          <p:cNvSpPr>
+            <a:spLocks noGrp="1"/>
+          </p:cNvSpPr>
+          <p:nvPr>
+            <p:ph idx="1"/>
+          </p:nvPr>
+        </p:nvSpPr>
+        <p:spPr/>
+        <p:txBody>
+          <a:bodyPr numCol="2">
+            <a:normAutofit fontScale="40000" lnSpcReduction="20000"/>
+          </a:bodyPr>
+          <a:lstStyle/>
+          <a:p>
+            <a:pPr marL="0" indent="0">
+              <a:buNone/>
+            </a:pPr>
+            <a:r>
+              <a:rPr lang="en-US" b="1" dirty="0"/>
+              <a:t>Duration:</a:t>
+            </a:r>
+            <a:r>
+              <a:rPr lang="en-US" dirty="0"/>
+              <a:t> 30-40 minutes</a:t>
+            </a:r>
+            <a:br>
+              <a:rPr lang="en-US" dirty="0"/>
+            </a:br>
+            <a:endParaRPr lang="en-US" dirty="0"/>
+          </a:p>
+          <a:p>
+            <a:pPr marL="0" indent="0">
+              <a:buNone/>
+            </a:pPr>
+            <a:r>
+              <a:rPr lang="en-US" b="1" dirty="0"/>
+              <a:t>Objectives</a:t>
+            </a:r>
+            <a:br>
+              <a:rPr lang="en-US" dirty="0"/>
+            </a:br>
+            <a:endParaRPr lang="en-US" dirty="0"/>
+          </a:p>
+          <a:p>
+            <a:pPr lvl="1"/>
+            <a:r>
+              <a:rPr lang="en-US" dirty="0"/>
+              <a:t>Use Copilot to resolve dependency issues</a:t>
+            </a:r>
+          </a:p>
+          <a:p>
+            <a:pPr lvl="1"/>
+            <a:r>
+              <a:rPr lang="en-US" dirty="0"/>
+              <a:t>Handle package restoration problems</a:t>
+            </a:r>
+          </a:p>
+          <a:p>
+            <a:pPr lvl="1"/>
+            <a:r>
+              <a:rPr lang="en-US" dirty="0"/>
+              <a:t>Practice iterative problem-solving with AI</a:t>
+            </a:r>
+            <a:br>
+              <a:rPr lang="en-US" dirty="0"/>
+            </a:br>
+            <a:endParaRPr lang="en-US" dirty="0"/>
+          </a:p>
+          <a:p>
+            <a:pPr marL="0" indent="0">
+              <a:buNone/>
+            </a:pPr>
+            <a:r>
+              <a:rPr lang="en-US" b="1" dirty="0"/>
+              <a:t>Activities</a:t>
+            </a:r>
+            <a:br>
+              <a:rPr lang="en-US" dirty="0"/>
+            </a:br>
+            <a:endParaRPr lang="en-US" dirty="0"/>
+          </a:p>
+          <a:p>
+            <a:pPr marL="0" indent="0">
+              <a:buNone/>
+            </a:pPr>
+            <a:r>
+              <a:rPr lang="en-US" dirty="0"/>
+              <a:t>1. </a:t>
+            </a:r>
+            <a:r>
+              <a:rPr lang="en-US" b="1" dirty="0"/>
+              <a:t>Simulate or Identify a Dependency Issue:</a:t>
+            </a:r>
+            <a:br>
+              <a:rPr lang="en-US" dirty="0"/>
+            </a:br>
+            <a:endParaRPr lang="en-US" dirty="0"/>
+          </a:p>
+          <a:p>
+            <a:pPr lvl="1"/>
+            <a:r>
+              <a:rPr lang="en-US" dirty="0"/>
+              <a:t>Introduce a version conflict (or use existing issue)</a:t>
+            </a:r>
+          </a:p>
+          <a:p>
+            <a:pPr lvl="1"/>
+            <a:r>
+              <a:rPr lang="en-US" dirty="0"/>
+              <a:t>Prompt: "I'm getting [specific error]. How do I fix it?"</a:t>
+            </a:r>
+            <a:br>
+              <a:rPr lang="en-US" dirty="0"/>
+            </a:br>
+            <a:endParaRPr lang="en-US" dirty="0"/>
+          </a:p>
+          <a:p>
+            <a:pPr marL="0" indent="0">
+              <a:buNone/>
+            </a:pPr>
+            <a:r>
+              <a:rPr lang="en-US" dirty="0"/>
+              <a:t>2. </a:t>
+            </a:r>
+            <a:r>
+              <a:rPr lang="en-US" b="1" dirty="0"/>
+              <a:t>Follow Copilot's Guidance:</a:t>
+            </a:r>
+            <a:br>
+              <a:rPr lang="en-US" dirty="0"/>
+            </a:br>
+            <a:endParaRPr lang="en-US" dirty="0"/>
+          </a:p>
+          <a:p>
+            <a:pPr lvl="1"/>
+            <a:r>
+              <a:rPr lang="en-US" dirty="0"/>
+              <a:t>Review suggested solutions</a:t>
+            </a:r>
+          </a:p>
+          <a:p>
+            <a:pPr lvl="1"/>
+            <a:r>
+              <a:rPr lang="en-US" dirty="0"/>
+              <a:t>Evaluate multiple approaches if offered</a:t>
+            </a:r>
+          </a:p>
+          <a:p>
+            <a:pPr lvl="1"/>
+            <a:r>
+              <a:rPr lang="en-US" dirty="0"/>
+              <a:t>Choose best solution collaboratively</a:t>
+            </a:r>
+            <a:br>
+              <a:rPr lang="en-US" dirty="0"/>
+            </a:br>
+            <a:endParaRPr lang="en-US" dirty="0"/>
+          </a:p>
+          <a:p>
+            <a:pPr marL="0" indent="0">
+              <a:buNone/>
+            </a:pPr>
+            <a:r>
+              <a:rPr lang="en-US" dirty="0"/>
+              <a:t>3. </a:t>
+            </a:r>
+            <a:r>
+              <a:rPr lang="en-US" b="1" dirty="0"/>
+              <a:t>Iterative Resolution:</a:t>
+            </a:r>
+            <a:br>
+              <a:rPr lang="en-US" dirty="0"/>
+            </a:br>
+            <a:endParaRPr lang="en-US" dirty="0"/>
+          </a:p>
+          <a:p>
+            <a:pPr lvl="1"/>
+            <a:r>
+              <a:rPr lang="en-US" dirty="0"/>
+              <a:t>If first solution doesn't work, provide error details</a:t>
+            </a:r>
+          </a:p>
+          <a:p>
+            <a:pPr lvl="1"/>
+            <a:r>
+              <a:rPr lang="en-US" dirty="0"/>
+              <a:t>Continue conversation until resolved</a:t>
+            </a:r>
+            <a:br>
+              <a:rPr lang="en-US" dirty="0"/>
+            </a:br>
+            <a:endParaRPr lang="en-US" dirty="0"/>
+          </a:p>
+          <a:p>
+            <a:pPr marL="0" indent="0">
+              <a:buNone/>
+            </a:pPr>
+            <a:r>
+              <a:rPr lang="en-US" dirty="0"/>
+              <a:t>4. </a:t>
+            </a:r>
+            <a:r>
+              <a:rPr lang="en-US" b="1" dirty="0"/>
+              <a:t>Common Issues to Practice:</a:t>
+            </a:r>
+            <a:br>
+              <a:rPr lang="en-US" b="1" dirty="0"/>
+            </a:br>
+            <a:endParaRPr lang="en-US" dirty="0"/>
+          </a:p>
+          <a:p>
+            <a:pPr lvl="1"/>
+            <a:r>
+              <a:rPr lang="en-US" dirty="0"/>
+              <a:t>NuGet package source configuration</a:t>
+            </a:r>
+          </a:p>
+          <a:p>
+            <a:pPr lvl="1"/>
+            <a:r>
+              <a:rPr lang="en-US" dirty="0" err="1"/>
+              <a:t>MSTest</a:t>
+            </a:r>
+            <a:r>
+              <a:rPr lang="en-US" dirty="0"/>
+              <a:t> adapter version conflicts</a:t>
+            </a:r>
+          </a:p>
+          <a:p>
+            <a:pPr lvl="1"/>
+            <a:r>
+              <a:rPr lang="en-US" dirty="0"/>
+              <a:t>.NET SDK targeting issues</a:t>
+            </a:r>
+          </a:p>
+          <a:p>
+            <a:pPr lvl="1"/>
+            <a:r>
+              <a:rPr lang="en-US" dirty="0"/>
+              <a:t>Package restoration failures</a:t>
+            </a:r>
+            <a:br>
+              <a:rPr lang="en-US" dirty="0"/>
+            </a:br>
+            <a:endParaRPr lang="en-US" dirty="0"/>
+          </a:p>
+          <a:p>
+            <a:pPr marL="0" indent="0">
+              <a:buNone/>
+            </a:pPr>
+            <a:r>
+              <a:rPr lang="en-US" b="1" dirty="0"/>
+              <a:t>Success Criteria</a:t>
+            </a:r>
+            <a:br>
+              <a:rPr lang="en-US" dirty="0"/>
+            </a:br>
+            <a:endParaRPr lang="en-US" dirty="0"/>
+          </a:p>
+          <a:p>
+            <a:pPr lvl="1"/>
+            <a:r>
+              <a:rPr lang="en-US" dirty="0"/>
+              <a:t>Successfully resolved at least one dependency issue</a:t>
+            </a:r>
+          </a:p>
+          <a:p>
+            <a:pPr lvl="1"/>
+            <a:r>
+              <a:rPr lang="en-US" dirty="0"/>
+              <a:t>Understand how to provide error context to Copilot</a:t>
+            </a:r>
+          </a:p>
+          <a:p>
+            <a:pPr lvl="1"/>
+            <a:r>
+              <a:rPr lang="en-US" dirty="0"/>
+              <a:t>Practiced iterative problem-solving approach</a:t>
+            </a:r>
+            <a:br>
+              <a:rPr lang="en-US" dirty="0"/>
+            </a:br>
+            <a:endParaRPr lang="en-US" dirty="0"/>
+          </a:p>
+          <a:p>
+            <a:pPr marL="0" indent="0">
+              <a:buNone/>
+            </a:pPr>
+            <a:r>
+              <a:rPr lang="en-US" b="1" dirty="0"/>
+              <a:t>Real-World Scenario</a:t>
+            </a:r>
+            <a:br>
+              <a:rPr lang="en-US" dirty="0"/>
+            </a:br>
+            <a:endParaRPr lang="en-US" dirty="0"/>
+          </a:p>
+          <a:p>
+            <a:pPr lvl="1"/>
+            <a:r>
+              <a:rPr lang="en-US" dirty="0"/>
+              <a:t>This lab replicates the exact dependency challenges encountered in the training session:</a:t>
+            </a:r>
+          </a:p>
+          <a:p>
+            <a:r>
+              <a:rPr lang="en-US" dirty="0"/>
+              <a:t>- Updating test project to target .NET 8</a:t>
+            </a:r>
+          </a:p>
+          <a:p>
+            <a:r>
+              <a:rPr lang="en-US" dirty="0"/>
+              <a:t>- Resolving NuGet.org package source mapping</a:t>
+            </a:r>
+          </a:p>
+          <a:p>
+            <a:r>
+              <a:rPr lang="en-US" dirty="0"/>
+              <a:t>- </a:t>
+            </a:r>
+            <a:r>
+              <a:rPr lang="en-US" dirty="0" err="1"/>
+              <a:t>MSTest</a:t>
+            </a:r>
+            <a:r>
+              <a:rPr lang="en-US" dirty="0"/>
+              <a:t> adapter compatibility issues</a:t>
+            </a:r>
+          </a:p>
+          <a:p>
+            <a:endParaRPr lang="en-US" dirty="0"/>
+          </a:p>
+        </p:txBody>
+      </p:sp>
+    </p:spTree>
+    <p:extLst>
+      <p:ext uri="{BB962C8B-B14F-4D97-AF65-F5344CB8AC3E}">
+        <p14:creationId xmlns:p14="http://schemas.microsoft.com/office/powerpoint/2010/main" val="2430478124"/>
+      </p:ext>
+    </p:extLst>
+  </p:cSld>
+  <p:clrMapOvr>
+    <a:masterClrMapping/>
+  </p:clrMapOvr>
+</p:sld>
+</file>
+
+<file path=ppt/slides/slide14.xml><?xml version="1.0" encoding="utf-8"?>
+<p:sld xmlns:a="http://schemas.openxmlformats.org/drawingml/2006/main" xmlns:r="http://schemas.openxmlformats.org/officeDocument/2006/relationships" xmlns:p="http://schemas.openxmlformats.org/presentationml/2006/main">
+  <p:cSld>
+    <p:spTree>
+      <p:nvGrpSpPr>
+        <p:cNvPr id="1" name=""/>
+        <p:cNvGrpSpPr/>
+        <p:nvPr/>
+      </p:nvGrpSpPr>
+      <p:grpSpPr>
+        <a:xfrm>
+          <a:off x="0" y="0"/>
+          <a:ext cx="0" cy="0"/>
+          <a:chOff x="0" y="0"/>
+          <a:chExt cx="0" cy="0"/>
+        </a:xfrm>
+      </p:grpSpPr>
+      <p:sp>
+        <p:nvSpPr>
+          <p:cNvPr id="2" name="Title 1">
+            <a:extLst>
+              <a:ext uri="{FF2B5EF4-FFF2-40B4-BE49-F238E27FC236}">
+                <a16:creationId xmlns:a16="http://schemas.microsoft.com/office/drawing/2014/main" id="{D3DFA241-5288-5B68-7313-C1234975E270}"/>
+              </a:ext>
+            </a:extLst>
+          </p:cNvPr>
+          <p:cNvSpPr>
+            <a:spLocks noGrp="1"/>
+          </p:cNvSpPr>
+          <p:nvPr>
+            <p:ph type="title"/>
+          </p:nvPr>
+        </p:nvSpPr>
+        <p:spPr/>
+        <p:txBody>
+          <a:bodyPr>
+            <a:noAutofit/>
+          </a:bodyPr>
+          <a:lstStyle/>
+          <a:p>
+            <a:r>
+              <a:rPr lang="en-US" sz="2667" dirty="0"/>
+              <a:t>Exercise: Best Practices Review &amp; Code Quality</a:t>
+            </a:r>
+          </a:p>
+        </p:txBody>
+      </p:sp>
+      <p:sp>
+        <p:nvSpPr>
+          <p:cNvPr id="3" name="Content Placeholder 2">
+            <a:extLst>
+              <a:ext uri="{FF2B5EF4-FFF2-40B4-BE49-F238E27FC236}">
+                <a16:creationId xmlns:a16="http://schemas.microsoft.com/office/drawing/2014/main" id="{8A9E1914-63E1-C502-BC85-BE8A86D0F672}"/>
+              </a:ext>
+            </a:extLst>
+          </p:cNvPr>
+          <p:cNvSpPr>
+            <a:spLocks noGrp="1"/>
+          </p:cNvSpPr>
+          <p:nvPr>
+            <p:ph idx="1"/>
+          </p:nvPr>
+        </p:nvSpPr>
+        <p:spPr/>
+        <p:txBody>
+          <a:bodyPr numCol="2">
+            <a:normAutofit fontScale="85000" lnSpcReduction="20000"/>
+          </a:bodyPr>
+          <a:lstStyle/>
+          <a:p>
+            <a:pPr marL="0" indent="0">
+              <a:buNone/>
+            </a:pPr>
+            <a:r>
+              <a:rPr lang="en-US" b="1" dirty="0"/>
+              <a:t>Duration:</a:t>
+            </a:r>
+            <a:r>
+              <a:rPr lang="en-US" dirty="0"/>
+              <a:t> 30-40 minutes</a:t>
+            </a:r>
+            <a:br>
+              <a:rPr lang="en-US" dirty="0"/>
+            </a:br>
+            <a:endParaRPr lang="en-US" dirty="0"/>
+          </a:p>
+          <a:p>
+            <a:pPr marL="0" indent="0">
+              <a:buNone/>
+            </a:pPr>
+            <a:r>
+              <a:rPr lang="en-US" b="1" dirty="0"/>
+              <a:t>Objectives</a:t>
+            </a:r>
+            <a:br>
+              <a:rPr lang="en-US" dirty="0"/>
+            </a:br>
+            <a:endParaRPr lang="en-US" dirty="0"/>
+          </a:p>
+          <a:p>
+            <a:pPr lvl="1"/>
+            <a:r>
+              <a:rPr lang="en-US" dirty="0"/>
+              <a:t>Apply best practices learned in session</a:t>
+            </a:r>
+          </a:p>
+          <a:p>
+            <a:pPr lvl="1"/>
+            <a:r>
+              <a:rPr lang="en-US" dirty="0"/>
+              <a:t>Review code quality systematically</a:t>
+            </a:r>
+          </a:p>
+          <a:p>
+            <a:pPr lvl="1"/>
+            <a:r>
+              <a:rPr lang="en-US" dirty="0"/>
+              <a:t>Identify and fix issues</a:t>
+            </a:r>
+            <a:br>
+              <a:rPr lang="en-US" dirty="0"/>
+            </a:br>
+            <a:endParaRPr lang="en-US" dirty="0"/>
+          </a:p>
+          <a:p>
+            <a:pPr marL="0" indent="0">
+              <a:buNone/>
+            </a:pPr>
+            <a:r>
+              <a:rPr lang="en-US" b="1" dirty="0"/>
+              <a:t>Activities</a:t>
+            </a:r>
+            <a:br>
+              <a:rPr lang="en-US" dirty="0"/>
+            </a:br>
+            <a:endParaRPr lang="en-US" dirty="0"/>
+          </a:p>
+          <a:p>
+            <a:pPr marL="0" indent="0">
+              <a:buNone/>
+            </a:pPr>
+            <a:r>
+              <a:rPr lang="en-US" dirty="0"/>
+              <a:t>1. </a:t>
+            </a:r>
+            <a:r>
+              <a:rPr lang="en-US" b="1" dirty="0"/>
+              <a:t>Code Quality Check:</a:t>
+            </a:r>
+            <a:br>
+              <a:rPr lang="en-US" dirty="0"/>
+            </a:br>
+            <a:endParaRPr lang="en-US" dirty="0"/>
+          </a:p>
+          <a:p>
+            <a:pPr lvl="1"/>
+            <a:r>
+              <a:rPr lang="en-US" dirty="0"/>
+              <a:t>Prompt: "Suggest improvements for code quality and maintainability"</a:t>
+            </a:r>
+          </a:p>
+          <a:p>
+            <a:pPr lvl="1"/>
+            <a:r>
+              <a:rPr lang="en-US" dirty="0"/>
+              <a:t>Evaluate suggestions critically</a:t>
+            </a:r>
+          </a:p>
+          <a:p>
+            <a:pPr lvl="1"/>
+            <a:r>
+              <a:rPr lang="en-US" dirty="0"/>
+              <a:t>Implement valuable improvements</a:t>
+            </a:r>
+            <a:br>
+              <a:rPr lang="en-US" dirty="0"/>
+            </a:br>
+            <a:endParaRPr lang="en-US" dirty="0"/>
+          </a:p>
+          <a:p>
+            <a:pPr marL="0" indent="0">
+              <a:buNone/>
+            </a:pPr>
+            <a:br>
+              <a:rPr lang="en-US" dirty="0"/>
+            </a:br>
+            <a:endParaRPr lang="en-US" dirty="0"/>
+          </a:p>
+          <a:p>
+            <a:pPr marL="0" indent="0">
+              <a:buNone/>
+            </a:pPr>
+            <a:r>
+              <a:rPr lang="en-US" b="1" dirty="0"/>
+              <a:t>Success Criteria</a:t>
+            </a:r>
+            <a:br>
+              <a:rPr lang="en-US" dirty="0"/>
+            </a:br>
+            <a:endParaRPr lang="en-US" dirty="0"/>
+          </a:p>
+          <a:p>
+            <a:pPr lvl="1"/>
+            <a:r>
+              <a:rPr lang="en-US" dirty="0"/>
+              <a:t>Comprehensive documentation added</a:t>
+            </a:r>
+          </a:p>
+          <a:p>
+            <a:pPr lvl="1"/>
+            <a:r>
+              <a:rPr lang="en-US" dirty="0"/>
+              <a:t>Critically evaluated all AI suggestions</a:t>
+            </a:r>
+            <a:br>
+              <a:rPr lang="en-US" dirty="0"/>
+            </a:br>
+            <a:endParaRPr lang="en-US" dirty="0"/>
+          </a:p>
+          <a:p>
+            <a:pPr marL="0" indent="0">
+              <a:buNone/>
+            </a:pPr>
+            <a:br>
+              <a:rPr lang="en-US" dirty="0"/>
+            </a:br>
+            <a:endParaRPr lang="en-US" dirty="0"/>
+          </a:p>
+          <a:p>
+            <a:endParaRPr lang="en-US" dirty="0"/>
+          </a:p>
+        </p:txBody>
+      </p:sp>
+    </p:spTree>
+    <p:extLst>
+      <p:ext uri="{BB962C8B-B14F-4D97-AF65-F5344CB8AC3E}">
+        <p14:creationId xmlns:p14="http://schemas.microsoft.com/office/powerpoint/2010/main" val="169862650"/>
+      </p:ext>
+    </p:extLst>
+  </p:cSld>
+  <p:clrMapOvr>
+    <a:masterClrMapping/>
+  </p:clrMapOvr>
+</p:sld>
+</file>
+
+<file path=ppt/slides/slide15.xml><?xml version="1.0" encoding="utf-8"?>
+<p:sld xmlns:a="http://schemas.openxmlformats.org/drawingml/2006/main" xmlns:r="http://schemas.openxmlformats.org/officeDocument/2006/relationships" xmlns:p="http://schemas.openxmlformats.org/presentationml/2006/main">
+  <p:cSld>
+    <p:spTree>
+      <p:nvGrpSpPr>
+        <p:cNvPr id="1" name=""/>
+        <p:cNvGrpSpPr/>
+        <p:nvPr/>
+      </p:nvGrpSpPr>
+      <p:grpSpPr>
+        <a:xfrm>
+          <a:off x="0" y="0"/>
+          <a:ext cx="0" cy="0"/>
+          <a:chOff x="0" y="0"/>
+          <a:chExt cx="0" cy="0"/>
+        </a:xfrm>
+      </p:grpSpPr>
+      <p:sp>
+        <p:nvSpPr>
+          <p:cNvPr id="2" name="Title 1">
+            <a:extLst>
+              <a:ext uri="{FF2B5EF4-FFF2-40B4-BE49-F238E27FC236}">
+                <a16:creationId xmlns:a16="http://schemas.microsoft.com/office/drawing/2014/main" id="{27DA8685-4A25-C580-568F-0B63C5D5901F}"/>
+              </a:ext>
+            </a:extLst>
+          </p:cNvPr>
+          <p:cNvSpPr>
+            <a:spLocks noGrp="1"/>
+          </p:cNvSpPr>
+          <p:nvPr>
+            <p:ph type="title"/>
+          </p:nvPr>
+        </p:nvSpPr>
+        <p:spPr/>
+        <p:txBody>
+          <a:bodyPr>
+            <a:noAutofit/>
+          </a:bodyPr>
+          <a:lstStyle/>
+          <a:p>
+            <a:r>
+              <a:rPr lang="en-US" sz="3733" dirty="0"/>
+              <a:t>Exercise: Model Comparisons</a:t>
+            </a:r>
+          </a:p>
+        </p:txBody>
+      </p:sp>
+      <p:sp>
+        <p:nvSpPr>
+          <p:cNvPr id="3" name="Content Placeholder 2">
+            <a:extLst>
+              <a:ext uri="{FF2B5EF4-FFF2-40B4-BE49-F238E27FC236}">
+                <a16:creationId xmlns:a16="http://schemas.microsoft.com/office/drawing/2014/main" id="{93958479-B067-F342-5A04-053B2822DE4E}"/>
+              </a:ext>
+            </a:extLst>
+          </p:cNvPr>
+          <p:cNvSpPr>
+            <a:spLocks noGrp="1"/>
+          </p:cNvSpPr>
+          <p:nvPr>
+            <p:ph idx="1"/>
+          </p:nvPr>
+        </p:nvSpPr>
+        <p:spPr/>
+        <p:txBody>
+          <a:bodyPr numCol="2">
+            <a:normAutofit fontScale="40000" lnSpcReduction="20000"/>
+          </a:bodyPr>
+          <a:lstStyle/>
+          <a:p>
+            <a:pPr marL="0" indent="0">
+              <a:buNone/>
+            </a:pPr>
+            <a:r>
+              <a:rPr lang="en-US" b="1" dirty="0"/>
+              <a:t>Duration:</a:t>
+            </a:r>
+            <a:r>
+              <a:rPr lang="en-US" dirty="0"/>
+              <a:t> 20-30 minutes</a:t>
+            </a:r>
+            <a:br>
+              <a:rPr lang="en-US" dirty="0"/>
+            </a:br>
+            <a:endParaRPr lang="en-US" dirty="0"/>
+          </a:p>
+          <a:p>
+            <a:pPr marL="0" indent="0">
+              <a:buNone/>
+            </a:pPr>
+            <a:r>
+              <a:rPr lang="en-US" b="1" dirty="0"/>
+              <a:t>Objectives</a:t>
+            </a:r>
+            <a:br>
+              <a:rPr lang="en-US" dirty="0"/>
+            </a:br>
+            <a:endParaRPr lang="en-US" dirty="0"/>
+          </a:p>
+          <a:p>
+            <a:pPr lvl="1"/>
+            <a:r>
+              <a:rPr lang="en-US" dirty="0"/>
+              <a:t>Compare outputs from different AI models</a:t>
+            </a:r>
+          </a:p>
+          <a:p>
+            <a:pPr lvl="1"/>
+            <a:r>
+              <a:rPr lang="en-US" dirty="0"/>
+              <a:t>Understand when to use premium vs standard models</a:t>
+            </a:r>
+          </a:p>
+          <a:p>
+            <a:pPr lvl="1"/>
+            <a:r>
+              <a:rPr lang="en-US" dirty="0"/>
+              <a:t>Monitor token usage</a:t>
+            </a:r>
+            <a:br>
+              <a:rPr lang="en-US" dirty="0"/>
+            </a:br>
+            <a:endParaRPr lang="en-US" dirty="0"/>
+          </a:p>
+          <a:p>
+            <a:pPr marL="0" indent="0">
+              <a:buNone/>
+            </a:pPr>
+            <a:r>
+              <a:rPr lang="en-US" b="1" dirty="0"/>
+              <a:t>Activities</a:t>
+            </a:r>
+            <a:br>
+              <a:rPr lang="en-US" dirty="0"/>
+            </a:br>
+            <a:endParaRPr lang="en-US" dirty="0"/>
+          </a:p>
+          <a:p>
+            <a:pPr marL="0" indent="0">
+              <a:buNone/>
+            </a:pPr>
+            <a:r>
+              <a:rPr lang="en-US" dirty="0"/>
+              <a:t>1. </a:t>
+            </a:r>
+            <a:r>
+              <a:rPr lang="en-US" b="1" dirty="0"/>
+              <a:t>Same Prompt, Different Models:</a:t>
+            </a:r>
+            <a:br>
+              <a:rPr lang="en-US" dirty="0"/>
+            </a:br>
+            <a:endParaRPr lang="en-US" dirty="0"/>
+          </a:p>
+          <a:p>
+            <a:pPr lvl="1"/>
+            <a:r>
+              <a:rPr lang="en-US" dirty="0"/>
+              <a:t>Choose a coding task (e.g., "implement bubble sort")</a:t>
+            </a:r>
+          </a:p>
+          <a:p>
+            <a:pPr lvl="1"/>
+            <a:r>
+              <a:rPr lang="en-US" dirty="0"/>
+              <a:t>Try with GPT-4 (standard - unlimited)</a:t>
+            </a:r>
+          </a:p>
+          <a:p>
+            <a:pPr lvl="1"/>
+            <a:r>
+              <a:rPr lang="en-US" dirty="0"/>
+              <a:t>Try with Claude Sonnet (premium - 1x token)</a:t>
+            </a:r>
+          </a:p>
+          <a:p>
+            <a:pPr lvl="1"/>
+            <a:r>
+              <a:rPr lang="en-US" dirty="0"/>
+              <a:t>Compare results for quality, style, completeness</a:t>
+            </a:r>
+            <a:br>
+              <a:rPr lang="en-US" dirty="0"/>
+            </a:br>
+            <a:endParaRPr lang="en-US" dirty="0"/>
+          </a:p>
+          <a:p>
+            <a:pPr marL="0" indent="0">
+              <a:buNone/>
+            </a:pPr>
+            <a:r>
+              <a:rPr lang="en-US" dirty="0"/>
+              <a:t>2. </a:t>
+            </a:r>
+            <a:r>
+              <a:rPr lang="en-US" b="1" dirty="0"/>
+              <a:t>Token Usage Analysis:</a:t>
+            </a:r>
+            <a:br>
+              <a:rPr lang="en-US" dirty="0"/>
+            </a:br>
+            <a:endParaRPr lang="en-US" dirty="0"/>
+          </a:p>
+          <a:p>
+            <a:pPr lvl="1"/>
+            <a:r>
+              <a:rPr lang="en-US" dirty="0"/>
+              <a:t>Check premium token bar before and after</a:t>
+            </a:r>
+          </a:p>
+          <a:p>
+            <a:pPr lvl="1"/>
+            <a:r>
+              <a:rPr lang="en-US" dirty="0"/>
+              <a:t>Calculate tokens consumed</a:t>
+            </a:r>
+          </a:p>
+          <a:p>
+            <a:pPr lvl="1"/>
+            <a:r>
+              <a:rPr lang="en-US" dirty="0"/>
+              <a:t>Discuss: Was premium model worth the cost?</a:t>
+            </a:r>
+            <a:br>
+              <a:rPr lang="en-US" dirty="0"/>
+            </a:br>
+            <a:endParaRPr lang="en-US" dirty="0"/>
+          </a:p>
+          <a:p>
+            <a:pPr marL="0" indent="0">
+              <a:buNone/>
+            </a:pPr>
+            <a:r>
+              <a:rPr lang="en-US" dirty="0"/>
+              <a:t>3. </a:t>
+            </a:r>
+            <a:r>
+              <a:rPr lang="en-US" b="1" dirty="0"/>
+              <a:t>Best Use Cases:</a:t>
+            </a:r>
+            <a:br>
+              <a:rPr lang="en-US" dirty="0"/>
+            </a:br>
+            <a:endParaRPr lang="en-US" dirty="0"/>
+          </a:p>
+          <a:p>
+            <a:pPr lvl="1"/>
+            <a:r>
+              <a:rPr lang="en-US" dirty="0"/>
+              <a:t>Identify tasks where standard models suffice</a:t>
+            </a:r>
+          </a:p>
+          <a:p>
+            <a:pPr lvl="1"/>
+            <a:r>
+              <a:rPr lang="en-US" dirty="0"/>
+              <a:t>Identify tasks requiring premium models</a:t>
+            </a:r>
+          </a:p>
+          <a:p>
+            <a:pPr lvl="1"/>
+            <a:r>
+              <a:rPr lang="en-US" dirty="0"/>
+              <a:t>Create personal guidelines for model selection</a:t>
+            </a:r>
+            <a:br>
+              <a:rPr lang="en-US" dirty="0"/>
+            </a:br>
+            <a:endParaRPr lang="en-US" dirty="0"/>
+          </a:p>
+          <a:p>
+            <a:pPr marL="0" indent="0">
+              <a:buNone/>
+            </a:pPr>
+            <a:r>
+              <a:rPr lang="en-US" dirty="0"/>
+              <a:t>4. </a:t>
+            </a:r>
+            <a:r>
+              <a:rPr lang="en-US" b="1" dirty="0"/>
+              <a:t>Ask Mode Advantage:</a:t>
+            </a:r>
+            <a:endParaRPr lang="en-US" dirty="0"/>
+          </a:p>
+          <a:p>
+            <a:pPr lvl="1"/>
+            <a:r>
+              <a:rPr lang="en-US" dirty="0"/>
+              <a:t>Use Ask mode with premium models (no token cost)</a:t>
+            </a:r>
+          </a:p>
+          <a:p>
+            <a:pPr lvl="1"/>
+            <a:r>
+              <a:rPr lang="en-US" dirty="0"/>
+              <a:t>Compare to Agent mode token consumption</a:t>
+            </a:r>
+            <a:br>
+              <a:rPr lang="en-US" dirty="0"/>
+            </a:br>
+            <a:endParaRPr lang="en-US" dirty="0"/>
+          </a:p>
+          <a:p>
+            <a:pPr marL="0" indent="0">
+              <a:buNone/>
+            </a:pPr>
+            <a:r>
+              <a:rPr lang="en-US" b="1" dirty="0"/>
+              <a:t>Success Criteria</a:t>
+            </a:r>
+            <a:br>
+              <a:rPr lang="en-US" dirty="0"/>
+            </a:br>
+            <a:endParaRPr lang="en-US" dirty="0"/>
+          </a:p>
+          <a:p>
+            <a:pPr lvl="1"/>
+            <a:r>
+              <a:rPr lang="en-US" dirty="0"/>
+              <a:t>Compared at least 2 different models</a:t>
+            </a:r>
+          </a:p>
+          <a:p>
+            <a:pPr lvl="1"/>
+            <a:r>
+              <a:rPr lang="en-US" dirty="0"/>
+              <a:t>Understand token consumption impact</a:t>
+            </a:r>
+          </a:p>
+          <a:p>
+            <a:pPr lvl="1"/>
+            <a:r>
+              <a:rPr lang="en-US" dirty="0"/>
+              <a:t>Can make informed model selection decisions</a:t>
+            </a:r>
+            <a:br>
+              <a:rPr lang="en-US" dirty="0"/>
+            </a:br>
+            <a:endParaRPr lang="en-US" dirty="0"/>
+          </a:p>
+          <a:p>
+            <a:pPr marL="0" indent="0">
+              <a:buNone/>
+            </a:pPr>
+            <a:r>
+              <a:rPr lang="en-US" b="1" dirty="0"/>
+              <a:t>Token Economics</a:t>
+            </a:r>
+            <a:br>
+              <a:rPr lang="en-US" dirty="0"/>
+            </a:br>
+            <a:endParaRPr lang="en-US" dirty="0"/>
+          </a:p>
+          <a:p>
+            <a:pPr lvl="1"/>
+            <a:r>
+              <a:rPr lang="en-US" b="1" dirty="0"/>
+              <a:t>Standard models (unlimited):</a:t>
+            </a:r>
+            <a:r>
+              <a:rPr lang="en-US" dirty="0"/>
+              <a:t> ChatGPT-4</a:t>
+            </a:r>
+          </a:p>
+          <a:p>
+            <a:pPr lvl="1"/>
+            <a:r>
+              <a:rPr lang="en-US" b="1" dirty="0"/>
+              <a:t>Premium tokens (counted):</a:t>
+            </a:r>
+            <a:endParaRPr lang="en-US" dirty="0"/>
+          </a:p>
+          <a:p>
+            <a:pPr lvl="1"/>
+            <a:r>
+              <a:rPr lang="en-US" dirty="0"/>
+              <a:t>Claude Haiku 4.5: 1/3 token per request</a:t>
+            </a:r>
+          </a:p>
+          <a:p>
+            <a:pPr lvl="1"/>
+            <a:r>
+              <a:rPr lang="en-US" dirty="0"/>
+              <a:t>Claude Sonnet: 1x token per request</a:t>
+            </a:r>
+          </a:p>
+          <a:p>
+            <a:pPr lvl="1"/>
+            <a:r>
+              <a:rPr lang="en-US" dirty="0"/>
+              <a:t>O2 mini: 1/3 token per request</a:t>
+            </a:r>
+          </a:p>
+          <a:p>
+            <a:pPr lvl="1"/>
+            <a:r>
+              <a:rPr lang="en-US" dirty="0"/>
+              <a:t>New models: May be 10x when first released</a:t>
+            </a:r>
+          </a:p>
+          <a:p>
+            <a:endParaRPr lang="en-US" dirty="0"/>
+          </a:p>
+        </p:txBody>
+      </p:sp>
+    </p:spTree>
+    <p:extLst>
+      <p:ext uri="{BB962C8B-B14F-4D97-AF65-F5344CB8AC3E}">
+        <p14:creationId xmlns:p14="http://schemas.microsoft.com/office/powerpoint/2010/main" val="1034004045"/>
+      </p:ext>
+    </p:extLst>
+  </p:cSld>
+  <p:clrMapOvr>
+    <a:masterClrMapping/>
+  </p:clrMapOvr>
+</p:sld>
+</file>
+
+<file path=ppt/slides/slide16.xml><?xml version="1.0" encoding="utf-8"?>
 <p:sld xmlns:a="http://schemas.openxmlformats.org/drawingml/2006/main" xmlns:r="http://schemas.openxmlformats.org/officeDocument/2006/relationships" xmlns:p="http://schemas.openxmlformats.org/presentationml/2006/main">
   <p:cSld>
     <p:spTree>
@@ -5101,7 +6622,7 @@
 </p:sld>
 </file>
 
-<file path=ppt/slides/slide13.xml><?xml version="1.0" encoding="utf-8"?>
+<file path=ppt/slides/slide17.xml><?xml version="1.0" encoding="utf-8"?>
 <p:sld xmlns:a="http://schemas.openxmlformats.org/drawingml/2006/main" xmlns:r="http://schemas.openxmlformats.org/officeDocument/2006/relationships" xmlns:p="http://schemas.openxmlformats.org/presentationml/2006/main">
   <p:cSld>
     <p:spTree>
@@ -5341,7 +6862,7 @@
 </p:sld>
 </file>
 
-<file path=ppt/slides/slide14.xml><?xml version="1.0" encoding="utf-8"?>
+<file path=ppt/slides/slide18.xml><?xml version="1.0" encoding="utf-8"?>
 <p:sld xmlns:a="http://schemas.openxmlformats.org/drawingml/2006/main" xmlns:r="http://schemas.openxmlformats.org/officeDocument/2006/relationships" xmlns:p="http://schemas.openxmlformats.org/presentationml/2006/main">
   <p:cSld>
     <p:spTree>
@@ -5584,7 +7105,7 @@
 </p:sld>
 </file>
 
-<file path=ppt/slides/slide15.xml><?xml version="1.0" encoding="utf-8"?>
+<file path=ppt/slides/slide19.xml><?xml version="1.0" encoding="utf-8"?>
 <p:sld xmlns:a="http://schemas.openxmlformats.org/drawingml/2006/main" xmlns:r="http://schemas.openxmlformats.org/officeDocument/2006/relationships" xmlns:p="http://schemas.openxmlformats.org/presentationml/2006/main">
   <p:cSld>
     <p:spTree>
@@ -5829,1371 +7350,6 @@
     <p:extLst>
       <p:ext uri="{BB962C8B-B14F-4D97-AF65-F5344CB8AC3E}">
         <p14:creationId xmlns:p14="http://schemas.microsoft.com/office/powerpoint/2010/main" val="350066662"/>
-      </p:ext>
-    </p:extLst>
-  </p:cSld>
-  <p:clrMapOvr>
-    <a:masterClrMapping/>
-  </p:clrMapOvr>
-</p:sld>
-</file>
-
-<file path=ppt/slides/slide16.xml><?xml version="1.0" encoding="utf-8"?>
-<p:sld xmlns:a="http://schemas.openxmlformats.org/drawingml/2006/main" xmlns:r="http://schemas.openxmlformats.org/officeDocument/2006/relationships" xmlns:p="http://schemas.openxmlformats.org/presentationml/2006/main">
-  <p:cSld>
-    <p:spTree>
-      <p:nvGrpSpPr>
-        <p:cNvPr id="1" name=""/>
-        <p:cNvGrpSpPr/>
-        <p:nvPr/>
-      </p:nvGrpSpPr>
-      <p:grpSpPr>
-        <a:xfrm>
-          <a:off x="0" y="0"/>
-          <a:ext cx="0" cy="0"/>
-          <a:chOff x="0" y="0"/>
-          <a:chExt cx="0" cy="0"/>
-        </a:xfrm>
-      </p:grpSpPr>
-      <p:sp>
-        <p:nvSpPr>
-          <p:cNvPr id="2" name="Title 1">
-            <a:extLst>
-              <a:ext uri="{FF2B5EF4-FFF2-40B4-BE49-F238E27FC236}">
-                <a16:creationId xmlns:a16="http://schemas.microsoft.com/office/drawing/2014/main" id="{DF27F4DA-D2F8-4B60-9DE3-301DB8D6794A}"/>
-              </a:ext>
-            </a:extLst>
-          </p:cNvPr>
-          <p:cNvSpPr>
-            <a:spLocks noGrp="1"/>
-          </p:cNvSpPr>
-          <p:nvPr>
-            <p:ph type="title"/>
-          </p:nvPr>
-        </p:nvSpPr>
-        <p:spPr/>
-        <p:txBody>
-          <a:bodyPr>
-            <a:noAutofit/>
-          </a:bodyPr>
-          <a:lstStyle/>
-          <a:p>
-            <a:r>
-              <a:rPr lang="en-US" sz="3733" dirty="0"/>
-              <a:t>Exercise: Calculator Project - Testing</a:t>
-            </a:r>
-          </a:p>
-        </p:txBody>
-      </p:sp>
-      <p:sp>
-        <p:nvSpPr>
-          <p:cNvPr id="3" name="Content Placeholder 2">
-            <a:extLst>
-              <a:ext uri="{FF2B5EF4-FFF2-40B4-BE49-F238E27FC236}">
-                <a16:creationId xmlns:a16="http://schemas.microsoft.com/office/drawing/2014/main" id="{7B7DCA1F-EBDC-7D8A-2582-15B2BE8B5E58}"/>
-              </a:ext>
-            </a:extLst>
-          </p:cNvPr>
-          <p:cNvSpPr>
-            <a:spLocks noGrp="1"/>
-          </p:cNvSpPr>
-          <p:nvPr>
-            <p:ph idx="1"/>
-          </p:nvPr>
-        </p:nvSpPr>
-        <p:spPr/>
-        <p:txBody>
-          <a:bodyPr numCol="2">
-            <a:normAutofit fontScale="55000" lnSpcReduction="20000"/>
-          </a:bodyPr>
-          <a:lstStyle/>
-          <a:p>
-            <a:pPr marL="0" indent="0">
-              <a:buNone/>
-            </a:pPr>
-            <a:r>
-              <a:rPr lang="en-US" b="1" dirty="0"/>
-              <a:t>Duration:</a:t>
-            </a:r>
-            <a:r>
-              <a:rPr lang="en-US" dirty="0"/>
-              <a:t> 45-60 minutes</a:t>
-            </a:r>
-            <a:br>
-              <a:rPr lang="en-US" dirty="0"/>
-            </a:br>
-            <a:endParaRPr lang="en-US" dirty="0"/>
-          </a:p>
-          <a:p>
-            <a:pPr marL="0" indent="0">
-              <a:buNone/>
-            </a:pPr>
-            <a:r>
-              <a:rPr lang="en-US" b="1" dirty="0"/>
-              <a:t>Objectives</a:t>
-            </a:r>
-            <a:br>
-              <a:rPr lang="en-US" dirty="0"/>
-            </a:br>
-            <a:endParaRPr lang="en-US" dirty="0"/>
-          </a:p>
-          <a:p>
-            <a:pPr lvl="1"/>
-            <a:r>
-              <a:rPr lang="en-US" dirty="0"/>
-              <a:t>Generate unit tests with AI assistance</a:t>
-            </a:r>
-          </a:p>
-          <a:p>
-            <a:pPr lvl="1"/>
-            <a:r>
-              <a:rPr lang="en-US" dirty="0"/>
-              <a:t>Identify quality issues in generated tests</a:t>
-            </a:r>
-          </a:p>
-          <a:p>
-            <a:pPr lvl="1"/>
-            <a:r>
-              <a:rPr lang="en-US" dirty="0"/>
-              <a:t>Understand the importance of reviewing AI-generated tests</a:t>
-            </a:r>
-            <a:br>
-              <a:rPr lang="en-US" dirty="0"/>
-            </a:br>
-            <a:endParaRPr lang="en-US" dirty="0"/>
-          </a:p>
-          <a:p>
-            <a:pPr marL="0" indent="0">
-              <a:buNone/>
-            </a:pPr>
-            <a:r>
-              <a:rPr lang="en-US" b="1" dirty="0"/>
-              <a:t>Activities</a:t>
-            </a:r>
-            <a:br>
-              <a:rPr lang="en-US" dirty="0"/>
-            </a:br>
-            <a:endParaRPr lang="en-US" dirty="0"/>
-          </a:p>
-          <a:p>
-            <a:pPr marL="0" indent="0">
-              <a:buNone/>
-            </a:pPr>
-            <a:r>
-              <a:rPr lang="en-US" dirty="0"/>
-              <a:t>1. </a:t>
-            </a:r>
-            <a:r>
-              <a:rPr lang="en-US" b="1" dirty="0"/>
-              <a:t>Generate Initial Tests:</a:t>
-            </a:r>
-            <a:br>
-              <a:rPr lang="en-US" dirty="0"/>
-            </a:br>
-            <a:endParaRPr lang="en-US" dirty="0"/>
-          </a:p>
-          <a:p>
-            <a:pPr lvl="1"/>
-            <a:r>
-              <a:rPr lang="en-US" dirty="0"/>
-              <a:t>Prompt: "Create unit tests for the calculator operations"</a:t>
-            </a:r>
-          </a:p>
-          <a:p>
-            <a:pPr lvl="1"/>
-            <a:r>
-              <a:rPr lang="en-US" dirty="0"/>
-              <a:t>Review generated test structure</a:t>
-            </a:r>
-          </a:p>
-          <a:p>
-            <a:pPr lvl="1"/>
-            <a:r>
-              <a:rPr lang="en-US" b="1" dirty="0"/>
-              <a:t>Critical Review:</a:t>
-            </a:r>
-            <a:r>
-              <a:rPr lang="en-US" dirty="0"/>
-              <a:t> Are tests calling your calculator code?</a:t>
-            </a:r>
-            <a:br>
-              <a:rPr lang="en-US" dirty="0"/>
-            </a:br>
-            <a:endParaRPr lang="en-US" dirty="0"/>
-          </a:p>
-          <a:p>
-            <a:pPr marL="0" indent="0">
-              <a:buNone/>
-            </a:pPr>
-            <a:r>
-              <a:rPr lang="en-US" dirty="0"/>
-              <a:t>2. </a:t>
-            </a:r>
-            <a:r>
-              <a:rPr lang="en-US" b="1" dirty="0"/>
-              <a:t>Fix Test Issues (Replicating Session Demo):</a:t>
-            </a:r>
-            <a:br>
-              <a:rPr lang="en-US" dirty="0"/>
-            </a:br>
-            <a:endParaRPr lang="en-US" dirty="0"/>
-          </a:p>
-          <a:p>
-            <a:pPr lvl="1"/>
-            <a:r>
-              <a:rPr lang="en-US" dirty="0"/>
-              <a:t>If tests are too simple (like `1 + 1 = 2` without calling calculator):</a:t>
-            </a:r>
-          </a:p>
-          <a:p>
-            <a:pPr lvl="1"/>
-            <a:r>
-              <a:rPr lang="en-US" dirty="0"/>
-              <a:t>Identify the problem</a:t>
-            </a:r>
-          </a:p>
-          <a:p>
-            <a:pPr lvl="1"/>
-            <a:r>
-              <a:rPr lang="en-US" dirty="0"/>
-              <a:t>Ask Copilot to fix it: "Update tests to call Calculator class methods"</a:t>
-            </a:r>
-          </a:p>
-          <a:p>
-            <a:pPr lvl="1"/>
-            <a:r>
-              <a:rPr lang="en-US" dirty="0"/>
-              <a:t>Verify tests now test actual implementation</a:t>
-            </a:r>
-            <a:br>
-              <a:rPr lang="en-US" dirty="0"/>
-            </a:br>
-            <a:endParaRPr lang="en-US" dirty="0"/>
-          </a:p>
-          <a:p>
-            <a:pPr marL="0" indent="0">
-              <a:buNone/>
-            </a:pPr>
-            <a:r>
-              <a:rPr lang="en-US" dirty="0"/>
-              <a:t>3. </a:t>
-            </a:r>
-            <a:r>
-              <a:rPr lang="en-US" b="1" dirty="0"/>
-              <a:t>Run Tests:</a:t>
-            </a:r>
-            <a:br>
-              <a:rPr lang="en-US" dirty="0"/>
-            </a:br>
-            <a:endParaRPr lang="en-US" dirty="0"/>
-          </a:p>
-          <a:p>
-            <a:pPr lvl="1"/>
-            <a:r>
-              <a:rPr lang="en-US" dirty="0"/>
-              <a:t>Execute test suite</a:t>
-            </a:r>
-          </a:p>
-          <a:p>
-            <a:pPr lvl="1"/>
-            <a:r>
-              <a:rPr lang="en-US" dirty="0"/>
-              <a:t>Review test output</a:t>
-            </a:r>
-          </a:p>
-          <a:p>
-            <a:pPr lvl="1"/>
-            <a:r>
-              <a:rPr lang="en-US" dirty="0"/>
-              <a:t>Debug any failing tests with Copilot's help</a:t>
-            </a:r>
-          </a:p>
-          <a:p>
-            <a:pPr marL="0" indent="0">
-              <a:buNone/>
-            </a:pPr>
-            <a:r>
-              <a:rPr lang="en-US" dirty="0"/>
-              <a:t>4. </a:t>
-            </a:r>
-            <a:r>
-              <a:rPr lang="en-US" b="1" dirty="0"/>
-              <a:t>Add Edge Cases:</a:t>
-            </a:r>
-            <a:endParaRPr lang="en-US" dirty="0"/>
-          </a:p>
-          <a:p>
-            <a:pPr lvl="1"/>
-            <a:r>
-              <a:rPr lang="en-US" dirty="0"/>
-              <a:t>Prompt: "Add tests for edge cases like division by zero"</a:t>
-            </a:r>
-          </a:p>
-          <a:p>
-            <a:pPr lvl="1"/>
-            <a:r>
-              <a:rPr lang="en-US" dirty="0"/>
-              <a:t>Verify exception handling tests are correct</a:t>
-            </a:r>
-            <a:br>
-              <a:rPr lang="en-US" dirty="0"/>
-            </a:br>
-            <a:endParaRPr lang="en-US" dirty="0"/>
-          </a:p>
-          <a:p>
-            <a:pPr marL="0" indent="0">
-              <a:buNone/>
-            </a:pPr>
-            <a:r>
-              <a:rPr lang="en-US" b="1" dirty="0"/>
-              <a:t>Success Criteria</a:t>
-            </a:r>
-            <a:br>
-              <a:rPr lang="en-US" dirty="0"/>
-            </a:br>
-            <a:endParaRPr lang="en-US" dirty="0"/>
-          </a:p>
-          <a:p>
-            <a:pPr lvl="1"/>
-            <a:r>
-              <a:rPr lang="en-US" dirty="0"/>
-              <a:t>Test suite with minimum 8 test cases</a:t>
-            </a:r>
-          </a:p>
-          <a:p>
-            <a:pPr lvl="1"/>
-            <a:r>
-              <a:rPr lang="en-US" dirty="0"/>
-              <a:t>All tests call actual calculator methods (not just language arithmetic)</a:t>
-            </a:r>
-          </a:p>
-          <a:p>
-            <a:pPr lvl="1"/>
-            <a:r>
-              <a:rPr lang="en-US" dirty="0"/>
-              <a:t>Tests include edge cases and error conditions</a:t>
-            </a:r>
-          </a:p>
-          <a:p>
-            <a:pPr lvl="1"/>
-            <a:r>
-              <a:rPr lang="en-US" dirty="0"/>
-              <a:t>All tests pass</a:t>
-            </a:r>
-            <a:br>
-              <a:rPr lang="en-US" dirty="0"/>
-            </a:br>
-            <a:endParaRPr lang="en-US" dirty="0"/>
-          </a:p>
-        </p:txBody>
-      </p:sp>
-    </p:spTree>
-    <p:extLst>
-      <p:ext uri="{BB962C8B-B14F-4D97-AF65-F5344CB8AC3E}">
-        <p14:creationId xmlns:p14="http://schemas.microsoft.com/office/powerpoint/2010/main" val="3520810844"/>
-      </p:ext>
-    </p:extLst>
-  </p:cSld>
-  <p:clrMapOvr>
-    <a:masterClrMapping/>
-  </p:clrMapOvr>
-</p:sld>
-</file>
-
-<file path=ppt/slides/slide17.xml><?xml version="1.0" encoding="utf-8"?>
-<p:sld xmlns:a="http://schemas.openxmlformats.org/drawingml/2006/main" xmlns:r="http://schemas.openxmlformats.org/officeDocument/2006/relationships" xmlns:p="http://schemas.openxmlformats.org/presentationml/2006/main">
-  <p:cSld>
-    <p:spTree>
-      <p:nvGrpSpPr>
-        <p:cNvPr id="1" name=""/>
-        <p:cNvGrpSpPr/>
-        <p:nvPr/>
-      </p:nvGrpSpPr>
-      <p:grpSpPr>
-        <a:xfrm>
-          <a:off x="0" y="0"/>
-          <a:ext cx="0" cy="0"/>
-          <a:chOff x="0" y="0"/>
-          <a:chExt cx="0" cy="0"/>
-        </a:xfrm>
-      </p:grpSpPr>
-      <p:sp>
-        <p:nvSpPr>
-          <p:cNvPr id="2" name="Title 1">
-            <a:extLst>
-              <a:ext uri="{FF2B5EF4-FFF2-40B4-BE49-F238E27FC236}">
-                <a16:creationId xmlns:a16="http://schemas.microsoft.com/office/drawing/2014/main" id="{BF7ADD32-5416-0192-2BE8-652D8E449EAB}"/>
-              </a:ext>
-            </a:extLst>
-          </p:cNvPr>
-          <p:cNvSpPr>
-            <a:spLocks noGrp="1"/>
-          </p:cNvSpPr>
-          <p:nvPr>
-            <p:ph type="title"/>
-          </p:nvPr>
-        </p:nvSpPr>
-        <p:spPr/>
-        <p:txBody>
-          <a:bodyPr>
-            <a:normAutofit/>
-          </a:bodyPr>
-          <a:lstStyle/>
-          <a:p>
-            <a:r>
-              <a:rPr lang="en-US" b="0" dirty="0"/>
-              <a:t>Exercise: Code Coverage</a:t>
-            </a:r>
-          </a:p>
-        </p:txBody>
-      </p:sp>
-      <p:sp>
-        <p:nvSpPr>
-          <p:cNvPr id="3" name="Content Placeholder 2">
-            <a:extLst>
-              <a:ext uri="{FF2B5EF4-FFF2-40B4-BE49-F238E27FC236}">
-                <a16:creationId xmlns:a16="http://schemas.microsoft.com/office/drawing/2014/main" id="{13D595A6-0F81-9AB3-F4B8-F6F0EDD923EF}"/>
-              </a:ext>
-            </a:extLst>
-          </p:cNvPr>
-          <p:cNvSpPr>
-            <a:spLocks noGrp="1"/>
-          </p:cNvSpPr>
-          <p:nvPr>
-            <p:ph idx="1"/>
-          </p:nvPr>
-        </p:nvSpPr>
-        <p:spPr/>
-        <p:txBody>
-          <a:bodyPr numCol="2">
-            <a:normAutofit fontScale="55000" lnSpcReduction="20000"/>
-          </a:bodyPr>
-          <a:lstStyle/>
-          <a:p>
-            <a:pPr marL="0" indent="0">
-              <a:buNone/>
-            </a:pPr>
-            <a:r>
-              <a:rPr lang="en-US" b="1" dirty="0"/>
-              <a:t>Duration:</a:t>
-            </a:r>
-            <a:r>
-              <a:rPr lang="en-US" dirty="0"/>
-              <a:t> 30-40 minutes</a:t>
-            </a:r>
-          </a:p>
-          <a:p>
-            <a:pPr marL="0" indent="0">
-              <a:buNone/>
-            </a:pPr>
-            <a:r>
-              <a:rPr lang="en-US" b="1" dirty="0"/>
-              <a:t>Objectives</a:t>
-            </a:r>
-            <a:br>
-              <a:rPr lang="en-US" dirty="0"/>
-            </a:br>
-            <a:endParaRPr lang="en-US" dirty="0"/>
-          </a:p>
-          <a:p>
-            <a:pPr lvl="1"/>
-            <a:r>
-              <a:rPr lang="en-US" dirty="0"/>
-              <a:t>Set up code coverage reporting</a:t>
-            </a:r>
-          </a:p>
-          <a:p>
-            <a:pPr lvl="1"/>
-            <a:r>
-              <a:rPr lang="en-US" dirty="0"/>
-              <a:t>Interpret coverage results</a:t>
-            </a:r>
-          </a:p>
-          <a:p>
-            <a:pPr lvl="1"/>
-            <a:r>
-              <a:rPr lang="en-US" dirty="0"/>
-              <a:t>Improve test coverage based on gaps</a:t>
-            </a:r>
-            <a:br>
-              <a:rPr lang="en-US" dirty="0"/>
-            </a:br>
-            <a:endParaRPr lang="en-US" dirty="0"/>
-          </a:p>
-          <a:p>
-            <a:pPr marL="0" indent="0">
-              <a:buNone/>
-            </a:pPr>
-            <a:r>
-              <a:rPr lang="en-US" b="1" dirty="0"/>
-              <a:t>Activities</a:t>
-            </a:r>
-            <a:br>
-              <a:rPr lang="en-US" dirty="0"/>
-            </a:br>
-            <a:endParaRPr lang="en-US" dirty="0"/>
-          </a:p>
-          <a:p>
-            <a:pPr marL="0" indent="0">
-              <a:buNone/>
-            </a:pPr>
-            <a:r>
-              <a:rPr lang="en-US" dirty="0"/>
-              <a:t>1. </a:t>
-            </a:r>
-            <a:r>
-              <a:rPr lang="en-US" b="1" dirty="0"/>
-              <a:t>Enable Coverage Collection:</a:t>
-            </a:r>
-            <a:br>
-              <a:rPr lang="en-US" dirty="0"/>
-            </a:br>
-            <a:endParaRPr lang="en-US" dirty="0"/>
-          </a:p>
-          <a:p>
-            <a:pPr lvl="1"/>
-            <a:r>
-              <a:rPr lang="en-US" dirty="0"/>
-              <a:t>Prompt: "Add code coverage reporting to my test project"</a:t>
-            </a:r>
-          </a:p>
-          <a:p>
-            <a:pPr lvl="1"/>
-            <a:r>
-              <a:rPr lang="en-US" dirty="0"/>
-              <a:t>Review package dependencies added</a:t>
-            </a:r>
-          </a:p>
-          <a:p>
-            <a:pPr lvl="1"/>
-            <a:r>
-              <a:rPr lang="en-US" dirty="0"/>
-              <a:t>Handle any NuGet/dependency issues with Copilot's help</a:t>
-            </a:r>
-            <a:br>
-              <a:rPr lang="en-US" dirty="0"/>
-            </a:br>
-            <a:endParaRPr lang="en-US" dirty="0"/>
-          </a:p>
-          <a:p>
-            <a:pPr marL="0" indent="0">
-              <a:buNone/>
-            </a:pPr>
-            <a:r>
-              <a:rPr lang="en-US" dirty="0"/>
-              <a:t>2. </a:t>
-            </a:r>
-            <a:r>
-              <a:rPr lang="en-US" b="1" dirty="0"/>
-              <a:t>Generate Coverage Report:</a:t>
-            </a:r>
-            <a:br>
-              <a:rPr lang="en-US" dirty="0"/>
-            </a:br>
-            <a:endParaRPr lang="en-US" dirty="0"/>
-          </a:p>
-          <a:p>
-            <a:pPr lvl="1"/>
-            <a:r>
-              <a:rPr lang="en-US" dirty="0"/>
-              <a:t>Run tests with coverage enabled</a:t>
-            </a:r>
-          </a:p>
-          <a:p>
-            <a:pPr lvl="1"/>
-            <a:r>
-              <a:rPr lang="en-US" dirty="0"/>
-              <a:t>Review coverage percentage</a:t>
-            </a:r>
-          </a:p>
-          <a:p>
-            <a:pPr lvl="1"/>
-            <a:r>
-              <a:rPr lang="en-US" dirty="0"/>
-              <a:t>Identify uncovered code paths</a:t>
-            </a:r>
-            <a:br>
-              <a:rPr lang="en-US" dirty="0"/>
-            </a:br>
-            <a:endParaRPr lang="en-US" dirty="0"/>
-          </a:p>
-          <a:p>
-            <a:pPr marL="0" indent="0">
-              <a:buNone/>
-            </a:pPr>
-            <a:r>
-              <a:rPr lang="en-US" dirty="0"/>
-              <a:t>3. </a:t>
-            </a:r>
-            <a:r>
-              <a:rPr lang="en-US" b="1" dirty="0"/>
-              <a:t>Improve Coverage:</a:t>
-            </a:r>
-            <a:br>
-              <a:rPr lang="en-US" b="1" dirty="0"/>
-            </a:br>
-            <a:endParaRPr lang="en-US" dirty="0"/>
-          </a:p>
-          <a:p>
-            <a:pPr lvl="1"/>
-            <a:r>
-              <a:rPr lang="en-US" dirty="0"/>
-              <a:t>Add tests for uncovered methods</a:t>
-            </a:r>
-          </a:p>
-          <a:p>
-            <a:pPr lvl="1"/>
-            <a:r>
-              <a:rPr lang="en-US" dirty="0"/>
-              <a:t>Re-run coverage to verify improvement</a:t>
-            </a:r>
-          </a:p>
-          <a:p>
-            <a:pPr lvl="1"/>
-            <a:r>
-              <a:rPr lang="en-US" dirty="0"/>
-              <a:t>Discuss: Is 100% coverage always necessary?</a:t>
-            </a:r>
-            <a:br>
-              <a:rPr lang="en-US" dirty="0"/>
-            </a:br>
-            <a:endParaRPr lang="en-US" dirty="0"/>
-          </a:p>
-          <a:p>
-            <a:pPr marL="0" indent="0">
-              <a:buNone/>
-            </a:pPr>
-            <a:r>
-              <a:rPr lang="en-US" b="1" dirty="0"/>
-              <a:t>Success Criteria</a:t>
-            </a:r>
-            <a:br>
-              <a:rPr lang="en-US" dirty="0"/>
-            </a:br>
-            <a:endParaRPr lang="en-US" dirty="0"/>
-          </a:p>
-          <a:p>
-            <a:pPr lvl="1"/>
-            <a:r>
-              <a:rPr lang="en-US" dirty="0"/>
-              <a:t>Code coverage reporting successfully configured</a:t>
-            </a:r>
-          </a:p>
-          <a:p>
-            <a:pPr lvl="1"/>
-            <a:r>
-              <a:rPr lang="en-US" dirty="0"/>
-              <a:t>Can generate and read coverage reports</a:t>
-            </a:r>
-          </a:p>
-          <a:p>
-            <a:pPr lvl="1"/>
-            <a:r>
-              <a:rPr lang="en-US" dirty="0"/>
-              <a:t>Achieved reasonable coverage (&gt;80% line coverage)</a:t>
-            </a:r>
-          </a:p>
-          <a:p>
-            <a:pPr lvl="1"/>
-            <a:r>
-              <a:rPr lang="en-US" dirty="0"/>
-              <a:t>Understand what coverage metrics mean</a:t>
-            </a:r>
-            <a:br>
-              <a:rPr lang="en-US" dirty="0"/>
-            </a:br>
-            <a:endParaRPr lang="en-US" dirty="0"/>
-          </a:p>
-          <a:p>
-            <a:pPr marL="0" indent="0">
-              <a:buNone/>
-            </a:pPr>
-            <a:r>
-              <a:rPr lang="en-US" b="1" dirty="0"/>
-              <a:t>Discussion Points</a:t>
-            </a:r>
-            <a:br>
-              <a:rPr lang="en-US" dirty="0"/>
-            </a:br>
-            <a:endParaRPr lang="en-US" dirty="0"/>
-          </a:p>
-          <a:p>
-            <a:pPr lvl="1"/>
-            <a:r>
-              <a:rPr lang="en-US" dirty="0"/>
-              <a:t>Feature coverage vs. code coverage (as raised by Tom in the session)</a:t>
-            </a:r>
-          </a:p>
-          <a:p>
-            <a:pPr lvl="1"/>
-            <a:r>
-              <a:rPr lang="en-US" dirty="0"/>
-              <a:t>When is test coverage sufficient?</a:t>
-            </a:r>
-          </a:p>
-          <a:p>
-            <a:pPr lvl="1"/>
-            <a:r>
-              <a:rPr lang="en-US" dirty="0"/>
-              <a:t>Quality of tests vs. quantity</a:t>
-            </a:r>
-          </a:p>
-        </p:txBody>
-      </p:sp>
-    </p:spTree>
-    <p:extLst>
-      <p:ext uri="{BB962C8B-B14F-4D97-AF65-F5344CB8AC3E}">
-        <p14:creationId xmlns:p14="http://schemas.microsoft.com/office/powerpoint/2010/main" val="3773342207"/>
-      </p:ext>
-    </p:extLst>
-  </p:cSld>
-  <p:clrMapOvr>
-    <a:masterClrMapping/>
-  </p:clrMapOvr>
-</p:sld>
-</file>
-
-<file path=ppt/slides/slide18.xml><?xml version="1.0" encoding="utf-8"?>
-<p:sld xmlns:a="http://schemas.openxmlformats.org/drawingml/2006/main" xmlns:r="http://schemas.openxmlformats.org/officeDocument/2006/relationships" xmlns:p="http://schemas.openxmlformats.org/presentationml/2006/main">
-  <p:cSld>
-    <p:spTree>
-      <p:nvGrpSpPr>
-        <p:cNvPr id="1" name=""/>
-        <p:cNvGrpSpPr/>
-        <p:nvPr/>
-      </p:nvGrpSpPr>
-      <p:grpSpPr>
-        <a:xfrm>
-          <a:off x="0" y="0"/>
-          <a:ext cx="0" cy="0"/>
-          <a:chOff x="0" y="0"/>
-          <a:chExt cx="0" cy="0"/>
-        </a:xfrm>
-      </p:grpSpPr>
-      <p:sp>
-        <p:nvSpPr>
-          <p:cNvPr id="2" name="Title 1">
-            <a:extLst>
-              <a:ext uri="{FF2B5EF4-FFF2-40B4-BE49-F238E27FC236}">
-                <a16:creationId xmlns:a16="http://schemas.microsoft.com/office/drawing/2014/main" id="{13DA5C8B-D3E3-71D7-A402-CA01FF5C0C63}"/>
-              </a:ext>
-            </a:extLst>
-          </p:cNvPr>
-          <p:cNvSpPr>
-            <a:spLocks noGrp="1"/>
-          </p:cNvSpPr>
-          <p:nvPr>
-            <p:ph type="title"/>
-          </p:nvPr>
-        </p:nvSpPr>
-        <p:spPr/>
-        <p:txBody>
-          <a:bodyPr>
-            <a:noAutofit/>
-          </a:bodyPr>
-          <a:lstStyle/>
-          <a:p>
-            <a:r>
-              <a:rPr lang="en-US" sz="2400" dirty="0"/>
-              <a:t>Exercise: Dependency Management &amp; Troubleshooting</a:t>
-            </a:r>
-          </a:p>
-        </p:txBody>
-      </p:sp>
-      <p:sp>
-        <p:nvSpPr>
-          <p:cNvPr id="3" name="Content Placeholder 2">
-            <a:extLst>
-              <a:ext uri="{FF2B5EF4-FFF2-40B4-BE49-F238E27FC236}">
-                <a16:creationId xmlns:a16="http://schemas.microsoft.com/office/drawing/2014/main" id="{5AB9ABBA-D52B-ABC8-3782-CACA185F2E8C}"/>
-              </a:ext>
-            </a:extLst>
-          </p:cNvPr>
-          <p:cNvSpPr>
-            <a:spLocks noGrp="1"/>
-          </p:cNvSpPr>
-          <p:nvPr>
-            <p:ph idx="1"/>
-          </p:nvPr>
-        </p:nvSpPr>
-        <p:spPr/>
-        <p:txBody>
-          <a:bodyPr numCol="2">
-            <a:normAutofit fontScale="40000" lnSpcReduction="20000"/>
-          </a:bodyPr>
-          <a:lstStyle/>
-          <a:p>
-            <a:pPr marL="0" indent="0">
-              <a:buNone/>
-            </a:pPr>
-            <a:r>
-              <a:rPr lang="en-US" b="1" dirty="0"/>
-              <a:t>Duration:</a:t>
-            </a:r>
-            <a:r>
-              <a:rPr lang="en-US" dirty="0"/>
-              <a:t> 30-40 minutes</a:t>
-            </a:r>
-            <a:br>
-              <a:rPr lang="en-US" dirty="0"/>
-            </a:br>
-            <a:endParaRPr lang="en-US" dirty="0"/>
-          </a:p>
-          <a:p>
-            <a:pPr marL="0" indent="0">
-              <a:buNone/>
-            </a:pPr>
-            <a:r>
-              <a:rPr lang="en-US" b="1" dirty="0"/>
-              <a:t>Objectives</a:t>
-            </a:r>
-            <a:br>
-              <a:rPr lang="en-US" dirty="0"/>
-            </a:br>
-            <a:endParaRPr lang="en-US" dirty="0"/>
-          </a:p>
-          <a:p>
-            <a:pPr lvl="1"/>
-            <a:r>
-              <a:rPr lang="en-US" dirty="0"/>
-              <a:t>Use Copilot to resolve dependency issues</a:t>
-            </a:r>
-          </a:p>
-          <a:p>
-            <a:pPr lvl="1"/>
-            <a:r>
-              <a:rPr lang="en-US" dirty="0"/>
-              <a:t>Handle package restoration problems</a:t>
-            </a:r>
-          </a:p>
-          <a:p>
-            <a:pPr lvl="1"/>
-            <a:r>
-              <a:rPr lang="en-US" dirty="0"/>
-              <a:t>Practice iterative problem-solving with AI</a:t>
-            </a:r>
-            <a:br>
-              <a:rPr lang="en-US" dirty="0"/>
-            </a:br>
-            <a:endParaRPr lang="en-US" dirty="0"/>
-          </a:p>
-          <a:p>
-            <a:pPr marL="0" indent="0">
-              <a:buNone/>
-            </a:pPr>
-            <a:r>
-              <a:rPr lang="en-US" b="1" dirty="0"/>
-              <a:t>Activities</a:t>
-            </a:r>
-            <a:br>
-              <a:rPr lang="en-US" dirty="0"/>
-            </a:br>
-            <a:endParaRPr lang="en-US" dirty="0"/>
-          </a:p>
-          <a:p>
-            <a:pPr marL="0" indent="0">
-              <a:buNone/>
-            </a:pPr>
-            <a:r>
-              <a:rPr lang="en-US" dirty="0"/>
-              <a:t>1. </a:t>
-            </a:r>
-            <a:r>
-              <a:rPr lang="en-US" b="1" dirty="0"/>
-              <a:t>Simulate or Identify a Dependency Issue:</a:t>
-            </a:r>
-            <a:br>
-              <a:rPr lang="en-US" dirty="0"/>
-            </a:br>
-            <a:endParaRPr lang="en-US" dirty="0"/>
-          </a:p>
-          <a:p>
-            <a:pPr lvl="1"/>
-            <a:r>
-              <a:rPr lang="en-US" dirty="0"/>
-              <a:t>Introduce a version conflict (or use existing issue)</a:t>
-            </a:r>
-          </a:p>
-          <a:p>
-            <a:pPr lvl="1"/>
-            <a:r>
-              <a:rPr lang="en-US" dirty="0"/>
-              <a:t>Prompt: "I'm getting [specific error]. How do I fix it?"</a:t>
-            </a:r>
-            <a:br>
-              <a:rPr lang="en-US" dirty="0"/>
-            </a:br>
-            <a:endParaRPr lang="en-US" dirty="0"/>
-          </a:p>
-          <a:p>
-            <a:pPr marL="0" indent="0">
-              <a:buNone/>
-            </a:pPr>
-            <a:r>
-              <a:rPr lang="en-US" dirty="0"/>
-              <a:t>2. </a:t>
-            </a:r>
-            <a:r>
-              <a:rPr lang="en-US" b="1" dirty="0"/>
-              <a:t>Follow Copilot's Guidance:</a:t>
-            </a:r>
-            <a:br>
-              <a:rPr lang="en-US" dirty="0"/>
-            </a:br>
-            <a:endParaRPr lang="en-US" dirty="0"/>
-          </a:p>
-          <a:p>
-            <a:pPr lvl="1"/>
-            <a:r>
-              <a:rPr lang="en-US" dirty="0"/>
-              <a:t>Review suggested solutions</a:t>
-            </a:r>
-          </a:p>
-          <a:p>
-            <a:pPr lvl="1"/>
-            <a:r>
-              <a:rPr lang="en-US" dirty="0"/>
-              <a:t>Evaluate multiple approaches if offered</a:t>
-            </a:r>
-          </a:p>
-          <a:p>
-            <a:pPr lvl="1"/>
-            <a:r>
-              <a:rPr lang="en-US" dirty="0"/>
-              <a:t>Choose best solution collaboratively</a:t>
-            </a:r>
-            <a:br>
-              <a:rPr lang="en-US" dirty="0"/>
-            </a:br>
-            <a:endParaRPr lang="en-US" dirty="0"/>
-          </a:p>
-          <a:p>
-            <a:pPr marL="0" indent="0">
-              <a:buNone/>
-            </a:pPr>
-            <a:r>
-              <a:rPr lang="en-US" dirty="0"/>
-              <a:t>3. </a:t>
-            </a:r>
-            <a:r>
-              <a:rPr lang="en-US" b="1" dirty="0"/>
-              <a:t>Iterative Resolution:</a:t>
-            </a:r>
-            <a:br>
-              <a:rPr lang="en-US" dirty="0"/>
-            </a:br>
-            <a:endParaRPr lang="en-US" dirty="0"/>
-          </a:p>
-          <a:p>
-            <a:pPr lvl="1"/>
-            <a:r>
-              <a:rPr lang="en-US" dirty="0"/>
-              <a:t>If first solution doesn't work, provide error details</a:t>
-            </a:r>
-          </a:p>
-          <a:p>
-            <a:pPr lvl="1"/>
-            <a:r>
-              <a:rPr lang="en-US" dirty="0"/>
-              <a:t>Continue conversation until resolved</a:t>
-            </a:r>
-            <a:br>
-              <a:rPr lang="en-US" dirty="0"/>
-            </a:br>
-            <a:endParaRPr lang="en-US" dirty="0"/>
-          </a:p>
-          <a:p>
-            <a:pPr marL="0" indent="0">
-              <a:buNone/>
-            </a:pPr>
-            <a:r>
-              <a:rPr lang="en-US" dirty="0"/>
-              <a:t>4. </a:t>
-            </a:r>
-            <a:r>
-              <a:rPr lang="en-US" b="1" dirty="0"/>
-              <a:t>Common Issues to Practice:</a:t>
-            </a:r>
-            <a:br>
-              <a:rPr lang="en-US" b="1" dirty="0"/>
-            </a:br>
-            <a:endParaRPr lang="en-US" dirty="0"/>
-          </a:p>
-          <a:p>
-            <a:pPr lvl="1"/>
-            <a:r>
-              <a:rPr lang="en-US" dirty="0"/>
-              <a:t>NuGet package source configuration</a:t>
-            </a:r>
-          </a:p>
-          <a:p>
-            <a:pPr lvl="1"/>
-            <a:r>
-              <a:rPr lang="en-US" dirty="0" err="1"/>
-              <a:t>MSTest</a:t>
-            </a:r>
-            <a:r>
-              <a:rPr lang="en-US" dirty="0"/>
-              <a:t> adapter version conflicts</a:t>
-            </a:r>
-          </a:p>
-          <a:p>
-            <a:pPr lvl="1"/>
-            <a:r>
-              <a:rPr lang="en-US" dirty="0"/>
-              <a:t>.NET SDK targeting issues</a:t>
-            </a:r>
-          </a:p>
-          <a:p>
-            <a:pPr lvl="1"/>
-            <a:r>
-              <a:rPr lang="en-US" dirty="0"/>
-              <a:t>Package restoration failures</a:t>
-            </a:r>
-            <a:br>
-              <a:rPr lang="en-US" dirty="0"/>
-            </a:br>
-            <a:endParaRPr lang="en-US" dirty="0"/>
-          </a:p>
-          <a:p>
-            <a:pPr marL="0" indent="0">
-              <a:buNone/>
-            </a:pPr>
-            <a:r>
-              <a:rPr lang="en-US" b="1" dirty="0"/>
-              <a:t>Success Criteria</a:t>
-            </a:r>
-            <a:br>
-              <a:rPr lang="en-US" dirty="0"/>
-            </a:br>
-            <a:endParaRPr lang="en-US" dirty="0"/>
-          </a:p>
-          <a:p>
-            <a:pPr lvl="1"/>
-            <a:r>
-              <a:rPr lang="en-US" dirty="0"/>
-              <a:t>Successfully resolved at least one dependency issue</a:t>
-            </a:r>
-          </a:p>
-          <a:p>
-            <a:pPr lvl="1"/>
-            <a:r>
-              <a:rPr lang="en-US" dirty="0"/>
-              <a:t>Understand how to provide error context to Copilot</a:t>
-            </a:r>
-          </a:p>
-          <a:p>
-            <a:pPr lvl="1"/>
-            <a:r>
-              <a:rPr lang="en-US" dirty="0"/>
-              <a:t>Practiced iterative problem-solving approach</a:t>
-            </a:r>
-            <a:br>
-              <a:rPr lang="en-US" dirty="0"/>
-            </a:br>
-            <a:endParaRPr lang="en-US" dirty="0"/>
-          </a:p>
-          <a:p>
-            <a:pPr marL="0" indent="0">
-              <a:buNone/>
-            </a:pPr>
-            <a:r>
-              <a:rPr lang="en-US" b="1" dirty="0"/>
-              <a:t>Real-World Scenario</a:t>
-            </a:r>
-            <a:br>
-              <a:rPr lang="en-US" dirty="0"/>
-            </a:br>
-            <a:endParaRPr lang="en-US" dirty="0"/>
-          </a:p>
-          <a:p>
-            <a:pPr lvl="1"/>
-            <a:r>
-              <a:rPr lang="en-US" dirty="0"/>
-              <a:t>This lab replicates the exact dependency challenges encountered in the training session:</a:t>
-            </a:r>
-          </a:p>
-          <a:p>
-            <a:r>
-              <a:rPr lang="en-US" dirty="0"/>
-              <a:t>- Updating test project to target .NET 8</a:t>
-            </a:r>
-          </a:p>
-          <a:p>
-            <a:r>
-              <a:rPr lang="en-US" dirty="0"/>
-              <a:t>- Resolving NuGet.org package source mapping</a:t>
-            </a:r>
-          </a:p>
-          <a:p>
-            <a:r>
-              <a:rPr lang="en-US" dirty="0"/>
-              <a:t>- </a:t>
-            </a:r>
-            <a:r>
-              <a:rPr lang="en-US" dirty="0" err="1"/>
-              <a:t>MSTest</a:t>
-            </a:r>
-            <a:r>
-              <a:rPr lang="en-US" dirty="0"/>
-              <a:t> adapter compatibility issues</a:t>
-            </a:r>
-          </a:p>
-          <a:p>
-            <a:endParaRPr lang="en-US" dirty="0"/>
-          </a:p>
-        </p:txBody>
-      </p:sp>
-    </p:spTree>
-    <p:extLst>
-      <p:ext uri="{BB962C8B-B14F-4D97-AF65-F5344CB8AC3E}">
-        <p14:creationId xmlns:p14="http://schemas.microsoft.com/office/powerpoint/2010/main" val="2430478124"/>
-      </p:ext>
-    </p:extLst>
-  </p:cSld>
-  <p:clrMapOvr>
-    <a:masterClrMapping/>
-  </p:clrMapOvr>
-</p:sld>
-</file>
-
-<file path=ppt/slides/slide19.xml><?xml version="1.0" encoding="utf-8"?>
-<p:sld xmlns:a="http://schemas.openxmlformats.org/drawingml/2006/main" xmlns:r="http://schemas.openxmlformats.org/officeDocument/2006/relationships" xmlns:p="http://schemas.openxmlformats.org/presentationml/2006/main">
-  <p:cSld>
-    <p:spTree>
-      <p:nvGrpSpPr>
-        <p:cNvPr id="1" name=""/>
-        <p:cNvGrpSpPr/>
-        <p:nvPr/>
-      </p:nvGrpSpPr>
-      <p:grpSpPr>
-        <a:xfrm>
-          <a:off x="0" y="0"/>
-          <a:ext cx="0" cy="0"/>
-          <a:chOff x="0" y="0"/>
-          <a:chExt cx="0" cy="0"/>
-        </a:xfrm>
-      </p:grpSpPr>
-      <p:sp>
-        <p:nvSpPr>
-          <p:cNvPr id="2" name="Title 1">
-            <a:extLst>
-              <a:ext uri="{FF2B5EF4-FFF2-40B4-BE49-F238E27FC236}">
-                <a16:creationId xmlns:a16="http://schemas.microsoft.com/office/drawing/2014/main" id="{D3DFA241-5288-5B68-7313-C1234975E270}"/>
-              </a:ext>
-            </a:extLst>
-          </p:cNvPr>
-          <p:cNvSpPr>
-            <a:spLocks noGrp="1"/>
-          </p:cNvSpPr>
-          <p:nvPr>
-            <p:ph type="title"/>
-          </p:nvPr>
-        </p:nvSpPr>
-        <p:spPr/>
-        <p:txBody>
-          <a:bodyPr>
-            <a:noAutofit/>
-          </a:bodyPr>
-          <a:lstStyle/>
-          <a:p>
-            <a:r>
-              <a:rPr lang="en-US" sz="2667" dirty="0"/>
-              <a:t>Exercise: Best Practices Review &amp; Code Quality</a:t>
-            </a:r>
-          </a:p>
-        </p:txBody>
-      </p:sp>
-      <p:sp>
-        <p:nvSpPr>
-          <p:cNvPr id="3" name="Content Placeholder 2">
-            <a:extLst>
-              <a:ext uri="{FF2B5EF4-FFF2-40B4-BE49-F238E27FC236}">
-                <a16:creationId xmlns:a16="http://schemas.microsoft.com/office/drawing/2014/main" id="{8A9E1914-63E1-C502-BC85-BE8A86D0F672}"/>
-              </a:ext>
-            </a:extLst>
-          </p:cNvPr>
-          <p:cNvSpPr>
-            <a:spLocks noGrp="1"/>
-          </p:cNvSpPr>
-          <p:nvPr>
-            <p:ph idx="1"/>
-          </p:nvPr>
-        </p:nvSpPr>
-        <p:spPr/>
-        <p:txBody>
-          <a:bodyPr numCol="2">
-            <a:normAutofit fontScale="85000" lnSpcReduction="20000"/>
-          </a:bodyPr>
-          <a:lstStyle/>
-          <a:p>
-            <a:pPr marL="0" indent="0">
-              <a:buNone/>
-            </a:pPr>
-            <a:r>
-              <a:rPr lang="en-US" b="1" dirty="0"/>
-              <a:t>Duration:</a:t>
-            </a:r>
-            <a:r>
-              <a:rPr lang="en-US" dirty="0"/>
-              <a:t> 30-40 minutes</a:t>
-            </a:r>
-            <a:br>
-              <a:rPr lang="en-US" dirty="0"/>
-            </a:br>
-            <a:endParaRPr lang="en-US" dirty="0"/>
-          </a:p>
-          <a:p>
-            <a:pPr marL="0" indent="0">
-              <a:buNone/>
-            </a:pPr>
-            <a:r>
-              <a:rPr lang="en-US" b="1" dirty="0"/>
-              <a:t>Objectives</a:t>
-            </a:r>
-            <a:br>
-              <a:rPr lang="en-US" dirty="0"/>
-            </a:br>
-            <a:endParaRPr lang="en-US" dirty="0"/>
-          </a:p>
-          <a:p>
-            <a:pPr lvl="1"/>
-            <a:r>
-              <a:rPr lang="en-US" dirty="0"/>
-              <a:t>Apply best practices learned in session</a:t>
-            </a:r>
-          </a:p>
-          <a:p>
-            <a:pPr lvl="1"/>
-            <a:r>
-              <a:rPr lang="en-US" dirty="0"/>
-              <a:t>Review code quality systematically</a:t>
-            </a:r>
-          </a:p>
-          <a:p>
-            <a:pPr lvl="1"/>
-            <a:r>
-              <a:rPr lang="en-US" dirty="0"/>
-              <a:t>Identify and fix issues</a:t>
-            </a:r>
-            <a:br>
-              <a:rPr lang="en-US" dirty="0"/>
-            </a:br>
-            <a:endParaRPr lang="en-US" dirty="0"/>
-          </a:p>
-          <a:p>
-            <a:pPr marL="0" indent="0">
-              <a:buNone/>
-            </a:pPr>
-            <a:r>
-              <a:rPr lang="en-US" b="1" dirty="0"/>
-              <a:t>Activities</a:t>
-            </a:r>
-            <a:br>
-              <a:rPr lang="en-US" dirty="0"/>
-            </a:br>
-            <a:endParaRPr lang="en-US" dirty="0"/>
-          </a:p>
-          <a:p>
-            <a:pPr marL="0" indent="0">
-              <a:buNone/>
-            </a:pPr>
-            <a:r>
-              <a:rPr lang="en-US" dirty="0"/>
-              <a:t>1. </a:t>
-            </a:r>
-            <a:r>
-              <a:rPr lang="en-US" b="1" dirty="0"/>
-              <a:t>Code Quality Check:</a:t>
-            </a:r>
-            <a:br>
-              <a:rPr lang="en-US" dirty="0"/>
-            </a:br>
-            <a:endParaRPr lang="en-US" dirty="0"/>
-          </a:p>
-          <a:p>
-            <a:pPr lvl="1"/>
-            <a:r>
-              <a:rPr lang="en-US" dirty="0"/>
-              <a:t>Prompt: "Suggest improvements for code quality and maintainability"</a:t>
-            </a:r>
-          </a:p>
-          <a:p>
-            <a:pPr lvl="1"/>
-            <a:r>
-              <a:rPr lang="en-US" dirty="0"/>
-              <a:t>Evaluate suggestions critically</a:t>
-            </a:r>
-          </a:p>
-          <a:p>
-            <a:pPr lvl="1"/>
-            <a:r>
-              <a:rPr lang="en-US" dirty="0"/>
-              <a:t>Implement valuable improvements</a:t>
-            </a:r>
-            <a:br>
-              <a:rPr lang="en-US" dirty="0"/>
-            </a:br>
-            <a:endParaRPr lang="en-US" dirty="0"/>
-          </a:p>
-          <a:p>
-            <a:pPr marL="0" indent="0">
-              <a:buNone/>
-            </a:pPr>
-            <a:br>
-              <a:rPr lang="en-US" dirty="0"/>
-            </a:br>
-            <a:endParaRPr lang="en-US" dirty="0"/>
-          </a:p>
-          <a:p>
-            <a:pPr marL="0" indent="0">
-              <a:buNone/>
-            </a:pPr>
-            <a:r>
-              <a:rPr lang="en-US" b="1" dirty="0"/>
-              <a:t>Success Criteria</a:t>
-            </a:r>
-            <a:br>
-              <a:rPr lang="en-US" dirty="0"/>
-            </a:br>
-            <a:endParaRPr lang="en-US" dirty="0"/>
-          </a:p>
-          <a:p>
-            <a:pPr lvl="1"/>
-            <a:r>
-              <a:rPr lang="en-US" dirty="0"/>
-              <a:t>Comprehensive documentation added</a:t>
-            </a:r>
-          </a:p>
-          <a:p>
-            <a:pPr lvl="1"/>
-            <a:r>
-              <a:rPr lang="en-US" dirty="0"/>
-              <a:t>Critically evaluated all AI suggestions</a:t>
-            </a:r>
-            <a:br>
-              <a:rPr lang="en-US" dirty="0"/>
-            </a:br>
-            <a:endParaRPr lang="en-US" dirty="0"/>
-          </a:p>
-          <a:p>
-            <a:pPr marL="0" indent="0">
-              <a:buNone/>
-            </a:pPr>
-            <a:br>
-              <a:rPr lang="en-US" dirty="0"/>
-            </a:br>
-            <a:endParaRPr lang="en-US" dirty="0"/>
-          </a:p>
-          <a:p>
-            <a:endParaRPr lang="en-US" dirty="0"/>
-          </a:p>
-        </p:txBody>
-      </p:sp>
-    </p:spTree>
-    <p:extLst>
-      <p:ext uri="{BB962C8B-B14F-4D97-AF65-F5344CB8AC3E}">
-        <p14:creationId xmlns:p14="http://schemas.microsoft.com/office/powerpoint/2010/main" val="169862650"/>
       </p:ext>
     </p:extLst>
   </p:cSld>
@@ -7925,1744 +8081,7 @@
 </p:sld>
 </file>
 
-<file path=ppt/slides/slide23.xml><?xml version="1.0" encoding="utf-8"?>
-<p:sld xmlns:a="http://schemas.openxmlformats.org/drawingml/2006/main" xmlns:r="http://schemas.openxmlformats.org/officeDocument/2006/relationships" xmlns:p="http://schemas.openxmlformats.org/presentationml/2006/main">
-  <p:cSld>
-    <p:spTree>
-      <p:nvGrpSpPr>
-        <p:cNvPr id="1" name=""/>
-        <p:cNvGrpSpPr/>
-        <p:nvPr/>
-      </p:nvGrpSpPr>
-      <p:grpSpPr>
-        <a:xfrm>
-          <a:off x="0" y="0"/>
-          <a:ext cx="0" cy="0"/>
-          <a:chOff x="0" y="0"/>
-          <a:chExt cx="0" cy="0"/>
-        </a:xfrm>
-      </p:grpSpPr>
-      <p:sp>
-        <p:nvSpPr>
-          <p:cNvPr id="2" name="Title 1">
-            <a:extLst>
-              <a:ext uri="{FF2B5EF4-FFF2-40B4-BE49-F238E27FC236}">
-                <a16:creationId xmlns:a16="http://schemas.microsoft.com/office/drawing/2014/main" id="{2236E483-6675-9C55-258A-279A49F38B92}"/>
-              </a:ext>
-            </a:extLst>
-          </p:cNvPr>
-          <p:cNvSpPr>
-            <a:spLocks noGrp="1"/>
-          </p:cNvSpPr>
-          <p:nvPr>
-            <p:ph type="title"/>
-          </p:nvPr>
-        </p:nvSpPr>
-        <p:spPr/>
-        <p:txBody>
-          <a:bodyPr>
-            <a:normAutofit/>
-          </a:bodyPr>
-          <a:lstStyle/>
-          <a:p>
-            <a:r>
-              <a:rPr lang="en-US" dirty="0">
-                <a:solidFill>
-                  <a:schemeClr val="bg1"/>
-                </a:solidFill>
-                <a:latin typeface="Noto Sans" panose="020B0502040504020204" pitchFamily="34" charset="0"/>
-                <a:ea typeface="Noto Sans" panose="020B0502040504020204" pitchFamily="34" charset="0"/>
-                <a:cs typeface="Noto Sans" panose="020B0502040504020204" pitchFamily="34" charset="0"/>
-              </a:rPr>
-              <a:t>Exercise: Chat Management &amp; Workflow</a:t>
-            </a:r>
-            <a:r>
-              <a:rPr lang="en-US" dirty="0">
-                <a:effectLst/>
-              </a:rPr>
-              <a:t> </a:t>
-            </a:r>
-            <a:endParaRPr lang="en-US" dirty="0"/>
-          </a:p>
-        </p:txBody>
-      </p:sp>
-      <p:sp>
-        <p:nvSpPr>
-          <p:cNvPr id="3" name="Content Placeholder 2">
-            <a:extLst>
-              <a:ext uri="{FF2B5EF4-FFF2-40B4-BE49-F238E27FC236}">
-                <a16:creationId xmlns:a16="http://schemas.microsoft.com/office/drawing/2014/main" id="{59D5686C-6448-8E87-B54F-0E4B67280C6D}"/>
-              </a:ext>
-            </a:extLst>
-          </p:cNvPr>
-          <p:cNvSpPr>
-            <a:spLocks noGrp="1"/>
-          </p:cNvSpPr>
-          <p:nvPr>
-            <p:ph idx="1"/>
-          </p:nvPr>
-        </p:nvSpPr>
-        <p:spPr/>
-        <p:txBody>
-          <a:bodyPr/>
-          <a:lstStyle/>
-          <a:p>
-            <a:endParaRPr lang="en-US"/>
-          </a:p>
-        </p:txBody>
-      </p:sp>
-    </p:spTree>
-    <p:extLst>
-      <p:ext uri="{BB962C8B-B14F-4D97-AF65-F5344CB8AC3E}">
-        <p14:creationId xmlns:p14="http://schemas.microsoft.com/office/powerpoint/2010/main" val="3463300118"/>
-      </p:ext>
-    </p:extLst>
-  </p:cSld>
-  <p:clrMapOvr>
-    <a:masterClrMapping/>
-  </p:clrMapOvr>
-</p:sld>
-</file>
-
-<file path=ppt/slides/slide24.xml><?xml version="1.0" encoding="utf-8"?>
-<p:sld xmlns:a="http://schemas.openxmlformats.org/drawingml/2006/main" xmlns:r="http://schemas.openxmlformats.org/officeDocument/2006/relationships" xmlns:p="http://schemas.openxmlformats.org/presentationml/2006/main">
-  <p:cSld>
-    <p:spTree>
-      <p:nvGrpSpPr>
-        <p:cNvPr id="1" name=""/>
-        <p:cNvGrpSpPr/>
-        <p:nvPr/>
-      </p:nvGrpSpPr>
-      <p:grpSpPr>
-        <a:xfrm>
-          <a:off x="0" y="0"/>
-          <a:ext cx="0" cy="0"/>
-          <a:chOff x="0" y="0"/>
-          <a:chExt cx="0" cy="0"/>
-        </a:xfrm>
-      </p:grpSpPr>
-      <p:sp>
-        <p:nvSpPr>
-          <p:cNvPr id="2" name="Title 1">
-            <a:extLst>
-              <a:ext uri="{FF2B5EF4-FFF2-40B4-BE49-F238E27FC236}">
-                <a16:creationId xmlns:a16="http://schemas.microsoft.com/office/drawing/2014/main" id="{E47E9768-8729-F319-A25D-B23464E2CB42}"/>
-              </a:ext>
-            </a:extLst>
-          </p:cNvPr>
-          <p:cNvSpPr>
-            <a:spLocks noGrp="1"/>
-          </p:cNvSpPr>
-          <p:nvPr>
-            <p:ph type="title"/>
-          </p:nvPr>
-        </p:nvSpPr>
-        <p:spPr/>
-        <p:txBody>
-          <a:bodyPr>
-            <a:normAutofit/>
-          </a:bodyPr>
-          <a:lstStyle/>
-          <a:p>
-            <a:r>
-              <a:rPr lang="en-US" dirty="0">
-                <a:solidFill>
-                  <a:schemeClr val="bg1"/>
-                </a:solidFill>
-                <a:latin typeface="Noto Sans" panose="020B0502040504020204" pitchFamily="34" charset="0"/>
-                <a:ea typeface="Noto Sans" panose="020B0502040504020204" pitchFamily="34" charset="0"/>
-                <a:cs typeface="Noto Sans" panose="020B0502040504020204" pitchFamily="34" charset="0"/>
-              </a:rPr>
-              <a:t>Exercise: CI/CD Pipeline Creation</a:t>
-            </a:r>
-            <a:r>
-              <a:rPr lang="en-US" dirty="0">
-                <a:effectLst/>
-              </a:rPr>
-              <a:t> </a:t>
-            </a:r>
-            <a:endParaRPr lang="en-US" dirty="0"/>
-          </a:p>
-        </p:txBody>
-      </p:sp>
-      <p:sp>
-        <p:nvSpPr>
-          <p:cNvPr id="3" name="Content Placeholder 2">
-            <a:extLst>
-              <a:ext uri="{FF2B5EF4-FFF2-40B4-BE49-F238E27FC236}">
-                <a16:creationId xmlns:a16="http://schemas.microsoft.com/office/drawing/2014/main" id="{81447651-240F-9DC6-EFE0-7EE7EF7D2719}"/>
-              </a:ext>
-            </a:extLst>
-          </p:cNvPr>
-          <p:cNvSpPr>
-            <a:spLocks noGrp="1"/>
-          </p:cNvSpPr>
-          <p:nvPr>
-            <p:ph idx="1"/>
-          </p:nvPr>
-        </p:nvSpPr>
-        <p:spPr/>
-        <p:txBody>
-          <a:bodyPr/>
-          <a:lstStyle/>
-          <a:p>
-            <a:endParaRPr lang="en-US"/>
-          </a:p>
-        </p:txBody>
-      </p:sp>
-    </p:spTree>
-    <p:extLst>
-      <p:ext uri="{BB962C8B-B14F-4D97-AF65-F5344CB8AC3E}">
-        <p14:creationId xmlns:p14="http://schemas.microsoft.com/office/powerpoint/2010/main" val="2244824176"/>
-      </p:ext>
-    </p:extLst>
-  </p:cSld>
-  <p:clrMapOvr>
-    <a:masterClrMapping/>
-  </p:clrMapOvr>
-</p:sld>
-</file>
-
-<file path=ppt/slides/slide25.xml><?xml version="1.0" encoding="utf-8"?>
-<p:sld xmlns:a="http://schemas.openxmlformats.org/drawingml/2006/main" xmlns:r="http://schemas.openxmlformats.org/officeDocument/2006/relationships" xmlns:p="http://schemas.openxmlformats.org/presentationml/2006/main">
-  <p:cSld>
-    <p:spTree>
-      <p:nvGrpSpPr>
-        <p:cNvPr id="1" name=""/>
-        <p:cNvGrpSpPr/>
-        <p:nvPr/>
-      </p:nvGrpSpPr>
-      <p:grpSpPr>
-        <a:xfrm>
-          <a:off x="0" y="0"/>
-          <a:ext cx="0" cy="0"/>
-          <a:chOff x="0" y="0"/>
-          <a:chExt cx="0" cy="0"/>
-        </a:xfrm>
-      </p:grpSpPr>
-      <p:sp>
-        <p:nvSpPr>
-          <p:cNvPr id="2" name="Title 1">
-            <a:extLst>
-              <a:ext uri="{FF2B5EF4-FFF2-40B4-BE49-F238E27FC236}">
-                <a16:creationId xmlns:a16="http://schemas.microsoft.com/office/drawing/2014/main" id="{94C25A62-5B35-36AD-67B0-4E72A359E649}"/>
-              </a:ext>
-            </a:extLst>
-          </p:cNvPr>
-          <p:cNvSpPr>
-            <a:spLocks noGrp="1"/>
-          </p:cNvSpPr>
-          <p:nvPr>
-            <p:ph type="title"/>
-          </p:nvPr>
-        </p:nvSpPr>
-        <p:spPr/>
-        <p:txBody>
-          <a:bodyPr>
-            <a:normAutofit/>
-          </a:bodyPr>
-          <a:lstStyle/>
-          <a:p>
-            <a:r>
-              <a:rPr lang="en-US" dirty="0">
-                <a:solidFill>
-                  <a:schemeClr val="bg1"/>
-                </a:solidFill>
-                <a:latin typeface="Noto Sans" panose="020B0502040504020204" pitchFamily="34" charset="0"/>
-                <a:ea typeface="Noto Sans" panose="020B0502040504020204" pitchFamily="34" charset="0"/>
-                <a:cs typeface="Noto Sans" panose="020B0502040504020204" pitchFamily="34" charset="0"/>
-              </a:rPr>
-              <a:t>Exercise: Pull Request Creation</a:t>
-            </a:r>
-            <a:r>
-              <a:rPr lang="en-US" dirty="0">
-                <a:effectLst/>
-              </a:rPr>
-              <a:t> </a:t>
-            </a:r>
-            <a:endParaRPr lang="en-US" dirty="0"/>
-          </a:p>
-        </p:txBody>
-      </p:sp>
-      <p:sp>
-        <p:nvSpPr>
-          <p:cNvPr id="3" name="Content Placeholder 2">
-            <a:extLst>
-              <a:ext uri="{FF2B5EF4-FFF2-40B4-BE49-F238E27FC236}">
-                <a16:creationId xmlns:a16="http://schemas.microsoft.com/office/drawing/2014/main" id="{BB43C19D-00C2-3A2C-1C56-619160E05338}"/>
-              </a:ext>
-            </a:extLst>
-          </p:cNvPr>
-          <p:cNvSpPr>
-            <a:spLocks noGrp="1"/>
-          </p:cNvSpPr>
-          <p:nvPr>
-            <p:ph idx="1"/>
-          </p:nvPr>
-        </p:nvSpPr>
-        <p:spPr/>
-        <p:txBody>
-          <a:bodyPr/>
-          <a:lstStyle/>
-          <a:p>
-            <a:endParaRPr lang="en-US"/>
-          </a:p>
-        </p:txBody>
-      </p:sp>
-    </p:spTree>
-    <p:extLst>
-      <p:ext uri="{BB962C8B-B14F-4D97-AF65-F5344CB8AC3E}">
-        <p14:creationId xmlns:p14="http://schemas.microsoft.com/office/powerpoint/2010/main" val="3257875534"/>
-      </p:ext>
-    </p:extLst>
-  </p:cSld>
-  <p:clrMapOvr>
-    <a:masterClrMapping/>
-  </p:clrMapOvr>
-</p:sld>
-</file>
-
-<file path=ppt/slides/slide26.xml><?xml version="1.0" encoding="utf-8"?>
-<p:sld xmlns:a="http://schemas.openxmlformats.org/drawingml/2006/main" xmlns:r="http://schemas.openxmlformats.org/officeDocument/2006/relationships" xmlns:p="http://schemas.openxmlformats.org/presentationml/2006/main">
-  <p:cSld>
-    <p:spTree>
-      <p:nvGrpSpPr>
-        <p:cNvPr id="1" name=""/>
-        <p:cNvGrpSpPr/>
-        <p:nvPr/>
-      </p:nvGrpSpPr>
-      <p:grpSpPr>
-        <a:xfrm>
-          <a:off x="0" y="0"/>
-          <a:ext cx="0" cy="0"/>
-          <a:chOff x="0" y="0"/>
-          <a:chExt cx="0" cy="0"/>
-        </a:xfrm>
-      </p:grpSpPr>
-      <p:sp>
-        <p:nvSpPr>
-          <p:cNvPr id="2" name="Title 1">
-            <a:extLst>
-              <a:ext uri="{FF2B5EF4-FFF2-40B4-BE49-F238E27FC236}">
-                <a16:creationId xmlns:a16="http://schemas.microsoft.com/office/drawing/2014/main" id="{C753927F-BE7F-9548-31B6-103E2EDCB15F}"/>
-              </a:ext>
-            </a:extLst>
-          </p:cNvPr>
-          <p:cNvSpPr>
-            <a:spLocks noGrp="1"/>
-          </p:cNvSpPr>
-          <p:nvPr>
-            <p:ph type="title"/>
-          </p:nvPr>
-        </p:nvSpPr>
-        <p:spPr/>
-        <p:txBody>
-          <a:bodyPr>
-            <a:normAutofit/>
-          </a:bodyPr>
-          <a:lstStyle/>
-          <a:p>
-            <a:r>
-              <a:rPr lang="en-US" dirty="0">
-                <a:solidFill>
-                  <a:schemeClr val="bg1"/>
-                </a:solidFill>
-                <a:latin typeface="Noto Sans" panose="020B0502040504020204" pitchFamily="34" charset="0"/>
-                <a:ea typeface="Noto Sans" panose="020B0502040504020204" pitchFamily="34" charset="0"/>
-                <a:cs typeface="Noto Sans" panose="020B0502040504020204" pitchFamily="34" charset="0"/>
-              </a:rPr>
-              <a:t>Exercise: Pipeline Debugging</a:t>
-            </a:r>
-            <a:r>
-              <a:rPr lang="en-US" dirty="0">
-                <a:effectLst/>
-              </a:rPr>
-              <a:t> </a:t>
-            </a:r>
-            <a:endParaRPr lang="en-US" dirty="0"/>
-          </a:p>
-        </p:txBody>
-      </p:sp>
-      <p:sp>
-        <p:nvSpPr>
-          <p:cNvPr id="3" name="Content Placeholder 2">
-            <a:extLst>
-              <a:ext uri="{FF2B5EF4-FFF2-40B4-BE49-F238E27FC236}">
-                <a16:creationId xmlns:a16="http://schemas.microsoft.com/office/drawing/2014/main" id="{90C9DF7F-9121-CA98-15E0-27042D2AD474}"/>
-              </a:ext>
-            </a:extLst>
-          </p:cNvPr>
-          <p:cNvSpPr>
-            <a:spLocks noGrp="1"/>
-          </p:cNvSpPr>
-          <p:nvPr>
-            <p:ph idx="1"/>
-          </p:nvPr>
-        </p:nvSpPr>
-        <p:spPr/>
-        <p:txBody>
-          <a:bodyPr/>
-          <a:lstStyle/>
-          <a:p>
-            <a:endParaRPr lang="en-US"/>
-          </a:p>
-        </p:txBody>
-      </p:sp>
-    </p:spTree>
-    <p:extLst>
-      <p:ext uri="{BB962C8B-B14F-4D97-AF65-F5344CB8AC3E}">
-        <p14:creationId xmlns:p14="http://schemas.microsoft.com/office/powerpoint/2010/main" val="2389147923"/>
-      </p:ext>
-    </p:extLst>
-  </p:cSld>
-  <p:clrMapOvr>
-    <a:masterClrMapping/>
-  </p:clrMapOvr>
-</p:sld>
-</file>
-
-<file path=ppt/slides/slide27.xml><?xml version="1.0" encoding="utf-8"?>
-<p:sld xmlns:a="http://schemas.openxmlformats.org/drawingml/2006/main" xmlns:r="http://schemas.openxmlformats.org/officeDocument/2006/relationships" xmlns:p="http://schemas.openxmlformats.org/presentationml/2006/main">
-  <p:cSld>
-    <p:spTree>
-      <p:nvGrpSpPr>
-        <p:cNvPr id="1" name=""/>
-        <p:cNvGrpSpPr/>
-        <p:nvPr/>
-      </p:nvGrpSpPr>
-      <p:grpSpPr>
-        <a:xfrm>
-          <a:off x="0" y="0"/>
-          <a:ext cx="0" cy="0"/>
-          <a:chOff x="0" y="0"/>
-          <a:chExt cx="0" cy="0"/>
-        </a:xfrm>
-      </p:grpSpPr>
-      <p:sp>
-        <p:nvSpPr>
-          <p:cNvPr id="2" name="Title 1">
-            <a:extLst>
-              <a:ext uri="{FF2B5EF4-FFF2-40B4-BE49-F238E27FC236}">
-                <a16:creationId xmlns:a16="http://schemas.microsoft.com/office/drawing/2014/main" id="{D01D5EB8-8723-8C1D-41BD-0A5F61786E79}"/>
-              </a:ext>
-            </a:extLst>
-          </p:cNvPr>
-          <p:cNvSpPr>
-            <a:spLocks noGrp="1"/>
-          </p:cNvSpPr>
-          <p:nvPr>
-            <p:ph type="title"/>
-          </p:nvPr>
-        </p:nvSpPr>
-        <p:spPr/>
-        <p:txBody>
-          <a:bodyPr>
-            <a:normAutofit/>
-          </a:bodyPr>
-          <a:lstStyle/>
-          <a:p>
-            <a:r>
-              <a:rPr lang="en-US" dirty="0">
-                <a:solidFill>
-                  <a:schemeClr val="bg1"/>
-                </a:solidFill>
-                <a:latin typeface="Noto Sans" panose="020B0502040504020204" pitchFamily="34" charset="0"/>
-                <a:ea typeface="Noto Sans" panose="020B0502040504020204" pitchFamily="34" charset="0"/>
-                <a:cs typeface="Noto Sans" panose="020B0502040504020204" pitchFamily="34" charset="0"/>
-              </a:rPr>
-              <a:t>Exercise: Coverage Improvement Iteration</a:t>
-            </a:r>
-            <a:r>
-              <a:rPr lang="en-US" dirty="0">
-                <a:effectLst/>
-              </a:rPr>
-              <a:t> </a:t>
-            </a:r>
-            <a:endParaRPr lang="en-US" dirty="0"/>
-          </a:p>
-        </p:txBody>
-      </p:sp>
-      <p:sp>
-        <p:nvSpPr>
-          <p:cNvPr id="3" name="Content Placeholder 2">
-            <a:extLst>
-              <a:ext uri="{FF2B5EF4-FFF2-40B4-BE49-F238E27FC236}">
-                <a16:creationId xmlns:a16="http://schemas.microsoft.com/office/drawing/2014/main" id="{C24EA1F8-90CC-14F0-E63B-7355B1199466}"/>
-              </a:ext>
-            </a:extLst>
-          </p:cNvPr>
-          <p:cNvSpPr>
-            <a:spLocks noGrp="1"/>
-          </p:cNvSpPr>
-          <p:nvPr>
-            <p:ph idx="1"/>
-          </p:nvPr>
-        </p:nvSpPr>
-        <p:spPr/>
-        <p:txBody>
-          <a:bodyPr/>
-          <a:lstStyle/>
-          <a:p>
-            <a:endParaRPr lang="en-US"/>
-          </a:p>
-        </p:txBody>
-      </p:sp>
-    </p:spTree>
-    <p:extLst>
-      <p:ext uri="{BB962C8B-B14F-4D97-AF65-F5344CB8AC3E}">
-        <p14:creationId xmlns:p14="http://schemas.microsoft.com/office/powerpoint/2010/main" val="638027553"/>
-      </p:ext>
-    </p:extLst>
-  </p:cSld>
-  <p:clrMapOvr>
-    <a:masterClrMapping/>
-  </p:clrMapOvr>
-</p:sld>
-</file>
-
-<file path=ppt/slides/slide28.xml><?xml version="1.0" encoding="utf-8"?>
-<p:sld xmlns:a="http://schemas.openxmlformats.org/drawingml/2006/main" xmlns:r="http://schemas.openxmlformats.org/officeDocument/2006/relationships" xmlns:p="http://schemas.openxmlformats.org/presentationml/2006/main">
-  <p:cSld>
-    <p:spTree>
-      <p:nvGrpSpPr>
-        <p:cNvPr id="1" name=""/>
-        <p:cNvGrpSpPr/>
-        <p:nvPr/>
-      </p:nvGrpSpPr>
-      <p:grpSpPr>
-        <a:xfrm>
-          <a:off x="0" y="0"/>
-          <a:ext cx="0" cy="0"/>
-          <a:chOff x="0" y="0"/>
-          <a:chExt cx="0" cy="0"/>
-        </a:xfrm>
-      </p:grpSpPr>
-      <p:sp>
-        <p:nvSpPr>
-          <p:cNvPr id="2" name="Title 1">
-            <a:extLst>
-              <a:ext uri="{FF2B5EF4-FFF2-40B4-BE49-F238E27FC236}">
-                <a16:creationId xmlns:a16="http://schemas.microsoft.com/office/drawing/2014/main" id="{66F1DBAE-2AD1-8C7C-5333-78DA9BE9A519}"/>
-              </a:ext>
-            </a:extLst>
-          </p:cNvPr>
-          <p:cNvSpPr>
-            <a:spLocks noGrp="1"/>
-          </p:cNvSpPr>
-          <p:nvPr>
-            <p:ph type="title"/>
-          </p:nvPr>
-        </p:nvSpPr>
-        <p:spPr/>
-        <p:txBody>
-          <a:bodyPr>
-            <a:normAutofit/>
-          </a:bodyPr>
-          <a:lstStyle/>
-          <a:p>
-            <a:r>
-              <a:rPr lang="en-US" dirty="0">
-                <a:solidFill>
-                  <a:schemeClr val="bg1"/>
-                </a:solidFill>
-                <a:latin typeface="Noto Sans" panose="020B0502040504020204" pitchFamily="34" charset="0"/>
-                <a:ea typeface="Noto Sans" panose="020B0502040504020204" pitchFamily="34" charset="0"/>
-                <a:cs typeface="Noto Sans" panose="020B0502040504020204" pitchFamily="34" charset="0"/>
-              </a:rPr>
-              <a:t>Exercise: Test-Driven Development (TDD)</a:t>
-            </a:r>
-            <a:r>
-              <a:rPr lang="en-US" dirty="0">
-                <a:effectLst/>
-              </a:rPr>
-              <a:t> </a:t>
-            </a:r>
-            <a:endParaRPr lang="en-US" dirty="0"/>
-          </a:p>
-        </p:txBody>
-      </p:sp>
-      <p:sp>
-        <p:nvSpPr>
-          <p:cNvPr id="3" name="Content Placeholder 2">
-            <a:extLst>
-              <a:ext uri="{FF2B5EF4-FFF2-40B4-BE49-F238E27FC236}">
-                <a16:creationId xmlns:a16="http://schemas.microsoft.com/office/drawing/2014/main" id="{009619BF-4EAE-6B90-969B-BD4CAACDB444}"/>
-              </a:ext>
-            </a:extLst>
-          </p:cNvPr>
-          <p:cNvSpPr>
-            <a:spLocks noGrp="1"/>
-          </p:cNvSpPr>
-          <p:nvPr>
-            <p:ph idx="1"/>
-          </p:nvPr>
-        </p:nvSpPr>
-        <p:spPr/>
-        <p:txBody>
-          <a:bodyPr/>
-          <a:lstStyle/>
-          <a:p>
-            <a:endParaRPr lang="en-US"/>
-          </a:p>
-        </p:txBody>
-      </p:sp>
-    </p:spTree>
-    <p:extLst>
-      <p:ext uri="{BB962C8B-B14F-4D97-AF65-F5344CB8AC3E}">
-        <p14:creationId xmlns:p14="http://schemas.microsoft.com/office/powerpoint/2010/main" val="1529871651"/>
-      </p:ext>
-    </p:extLst>
-  </p:cSld>
-  <p:clrMapOvr>
-    <a:masterClrMapping/>
-  </p:clrMapOvr>
-</p:sld>
-</file>
-
-<file path=ppt/slides/slide29.xml><?xml version="1.0" encoding="utf-8"?>
-<p:sld xmlns:a="http://schemas.openxmlformats.org/drawingml/2006/main" xmlns:r="http://schemas.openxmlformats.org/officeDocument/2006/relationships" xmlns:p="http://schemas.openxmlformats.org/presentationml/2006/main">
-  <p:cSld>
-    <p:spTree>
-      <p:nvGrpSpPr>
-        <p:cNvPr id="1" name=""/>
-        <p:cNvGrpSpPr/>
-        <p:nvPr/>
-      </p:nvGrpSpPr>
-      <p:grpSpPr>
-        <a:xfrm>
-          <a:off x="0" y="0"/>
-          <a:ext cx="0" cy="0"/>
-          <a:chOff x="0" y="0"/>
-          <a:chExt cx="0" cy="0"/>
-        </a:xfrm>
-      </p:grpSpPr>
-      <p:sp>
-        <p:nvSpPr>
-          <p:cNvPr id="2" name="Title 1">
-            <a:extLst>
-              <a:ext uri="{FF2B5EF4-FFF2-40B4-BE49-F238E27FC236}">
-                <a16:creationId xmlns:a16="http://schemas.microsoft.com/office/drawing/2014/main" id="{BCFCCDCD-D485-421A-4057-AAF3AAB20440}"/>
-              </a:ext>
-            </a:extLst>
-          </p:cNvPr>
-          <p:cNvSpPr>
-            <a:spLocks noGrp="1"/>
-          </p:cNvSpPr>
-          <p:nvPr>
-            <p:ph type="title"/>
-          </p:nvPr>
-        </p:nvSpPr>
-        <p:spPr/>
-        <p:txBody>
-          <a:bodyPr>
-            <a:normAutofit/>
-          </a:bodyPr>
-          <a:lstStyle/>
-          <a:p>
-            <a:r>
-              <a:rPr lang="en-US" dirty="0">
-                <a:solidFill>
-                  <a:schemeClr val="bg1"/>
-                </a:solidFill>
-                <a:latin typeface="Noto Sans" panose="020B0502040504020204" pitchFamily="34" charset="0"/>
-                <a:ea typeface="Noto Sans" panose="020B0502040504020204" pitchFamily="34" charset="0"/>
-                <a:cs typeface="Noto Sans" panose="020B0502040504020204" pitchFamily="34" charset="0"/>
-              </a:rPr>
-              <a:t>Exercise: Code Quality Analysis</a:t>
-            </a:r>
-            <a:r>
-              <a:rPr lang="en-US" dirty="0">
-                <a:effectLst/>
-              </a:rPr>
-              <a:t> </a:t>
-            </a:r>
-            <a:endParaRPr lang="en-US" dirty="0"/>
-          </a:p>
-        </p:txBody>
-      </p:sp>
-      <p:sp>
-        <p:nvSpPr>
-          <p:cNvPr id="3" name="Content Placeholder 2">
-            <a:extLst>
-              <a:ext uri="{FF2B5EF4-FFF2-40B4-BE49-F238E27FC236}">
-                <a16:creationId xmlns:a16="http://schemas.microsoft.com/office/drawing/2014/main" id="{FD99C9AB-1257-87E6-EC78-68FC2D6A70CD}"/>
-              </a:ext>
-            </a:extLst>
-          </p:cNvPr>
-          <p:cNvSpPr>
-            <a:spLocks noGrp="1"/>
-          </p:cNvSpPr>
-          <p:nvPr>
-            <p:ph idx="1"/>
-          </p:nvPr>
-        </p:nvSpPr>
-        <p:spPr/>
-        <p:txBody>
-          <a:bodyPr/>
-          <a:lstStyle/>
-          <a:p>
-            <a:endParaRPr lang="en-US"/>
-          </a:p>
-        </p:txBody>
-      </p:sp>
-    </p:spTree>
-    <p:extLst>
-      <p:ext uri="{BB962C8B-B14F-4D97-AF65-F5344CB8AC3E}">
-        <p14:creationId xmlns:p14="http://schemas.microsoft.com/office/powerpoint/2010/main" val="2478437151"/>
-      </p:ext>
-    </p:extLst>
-  </p:cSld>
-  <p:clrMapOvr>
-    <a:masterClrMapping/>
-  </p:clrMapOvr>
-</p:sld>
-</file>
-
 <file path=ppt/slides/slide3.xml><?xml version="1.0" encoding="utf-8"?>
-<p:sld xmlns:a="http://schemas.openxmlformats.org/drawingml/2006/main" xmlns:r="http://schemas.openxmlformats.org/officeDocument/2006/relationships" xmlns:p="http://schemas.openxmlformats.org/presentationml/2006/main">
-  <p:cSld>
-    <p:spTree>
-      <p:nvGrpSpPr>
-        <p:cNvPr id="1" name=""/>
-        <p:cNvGrpSpPr/>
-        <p:nvPr/>
-      </p:nvGrpSpPr>
-      <p:grpSpPr>
-        <a:xfrm>
-          <a:off x="0" y="0"/>
-          <a:ext cx="0" cy="0"/>
-          <a:chOff x="0" y="0"/>
-          <a:chExt cx="0" cy="0"/>
-        </a:xfrm>
-      </p:grpSpPr>
-      <p:sp>
-        <p:nvSpPr>
-          <p:cNvPr id="2" name="Title 1">
-            <a:extLst>
-              <a:ext uri="{FF2B5EF4-FFF2-40B4-BE49-F238E27FC236}">
-                <a16:creationId xmlns:a16="http://schemas.microsoft.com/office/drawing/2014/main" id="{27DA8685-4A25-C580-568F-0B63C5D5901F}"/>
-              </a:ext>
-            </a:extLst>
-          </p:cNvPr>
-          <p:cNvSpPr>
-            <a:spLocks noGrp="1"/>
-          </p:cNvSpPr>
-          <p:nvPr>
-            <p:ph type="title"/>
-          </p:nvPr>
-        </p:nvSpPr>
-        <p:spPr/>
-        <p:txBody>
-          <a:bodyPr>
-            <a:noAutofit/>
-          </a:bodyPr>
-          <a:lstStyle/>
-          <a:p>
-            <a:r>
-              <a:rPr lang="en-US" sz="3733" dirty="0"/>
-              <a:t>Exercise: Model Comparisons</a:t>
-            </a:r>
-          </a:p>
-        </p:txBody>
-      </p:sp>
-      <p:sp>
-        <p:nvSpPr>
-          <p:cNvPr id="3" name="Content Placeholder 2">
-            <a:extLst>
-              <a:ext uri="{FF2B5EF4-FFF2-40B4-BE49-F238E27FC236}">
-                <a16:creationId xmlns:a16="http://schemas.microsoft.com/office/drawing/2014/main" id="{93958479-B067-F342-5A04-053B2822DE4E}"/>
-              </a:ext>
-            </a:extLst>
-          </p:cNvPr>
-          <p:cNvSpPr>
-            <a:spLocks noGrp="1"/>
-          </p:cNvSpPr>
-          <p:nvPr>
-            <p:ph idx="1"/>
-          </p:nvPr>
-        </p:nvSpPr>
-        <p:spPr/>
-        <p:txBody>
-          <a:bodyPr numCol="2">
-            <a:normAutofit fontScale="40000" lnSpcReduction="20000"/>
-          </a:bodyPr>
-          <a:lstStyle/>
-          <a:p>
-            <a:pPr marL="0" indent="0">
-              <a:buNone/>
-            </a:pPr>
-            <a:r>
-              <a:rPr lang="en-US" b="1" dirty="0"/>
-              <a:t>Duration:</a:t>
-            </a:r>
-            <a:r>
-              <a:rPr lang="en-US" dirty="0"/>
-              <a:t> 20-30 minutes</a:t>
-            </a:r>
-            <a:br>
-              <a:rPr lang="en-US" dirty="0"/>
-            </a:br>
-            <a:endParaRPr lang="en-US" dirty="0"/>
-          </a:p>
-          <a:p>
-            <a:pPr marL="0" indent="0">
-              <a:buNone/>
-            </a:pPr>
-            <a:r>
-              <a:rPr lang="en-US" b="1" dirty="0"/>
-              <a:t>Objectives</a:t>
-            </a:r>
-            <a:br>
-              <a:rPr lang="en-US" dirty="0"/>
-            </a:br>
-            <a:endParaRPr lang="en-US" dirty="0"/>
-          </a:p>
-          <a:p>
-            <a:pPr lvl="1"/>
-            <a:r>
-              <a:rPr lang="en-US" dirty="0"/>
-              <a:t>Compare outputs from different AI models</a:t>
-            </a:r>
-          </a:p>
-          <a:p>
-            <a:pPr lvl="1"/>
-            <a:r>
-              <a:rPr lang="en-US" dirty="0"/>
-              <a:t>Understand when to use premium vs standard models</a:t>
-            </a:r>
-          </a:p>
-          <a:p>
-            <a:pPr lvl="1"/>
-            <a:r>
-              <a:rPr lang="en-US" dirty="0"/>
-              <a:t>Monitor token usage</a:t>
-            </a:r>
-            <a:br>
-              <a:rPr lang="en-US" dirty="0"/>
-            </a:br>
-            <a:endParaRPr lang="en-US" dirty="0"/>
-          </a:p>
-          <a:p>
-            <a:pPr marL="0" indent="0">
-              <a:buNone/>
-            </a:pPr>
-            <a:r>
-              <a:rPr lang="en-US" b="1" dirty="0"/>
-              <a:t>Activities</a:t>
-            </a:r>
-            <a:br>
-              <a:rPr lang="en-US" dirty="0"/>
-            </a:br>
-            <a:endParaRPr lang="en-US" dirty="0"/>
-          </a:p>
-          <a:p>
-            <a:pPr marL="0" indent="0">
-              <a:buNone/>
-            </a:pPr>
-            <a:r>
-              <a:rPr lang="en-US" dirty="0"/>
-              <a:t>1. </a:t>
-            </a:r>
-            <a:r>
-              <a:rPr lang="en-US" b="1" dirty="0"/>
-              <a:t>Same Prompt, Different Models:</a:t>
-            </a:r>
-            <a:br>
-              <a:rPr lang="en-US" dirty="0"/>
-            </a:br>
-            <a:endParaRPr lang="en-US" dirty="0"/>
-          </a:p>
-          <a:p>
-            <a:pPr lvl="1"/>
-            <a:r>
-              <a:rPr lang="en-US" dirty="0"/>
-              <a:t>Choose a coding task (e.g., "implement bubble sort")</a:t>
-            </a:r>
-          </a:p>
-          <a:p>
-            <a:pPr lvl="1"/>
-            <a:r>
-              <a:rPr lang="en-US" dirty="0"/>
-              <a:t>Try with GPT-4 (standard - unlimited)</a:t>
-            </a:r>
-          </a:p>
-          <a:p>
-            <a:pPr lvl="1"/>
-            <a:r>
-              <a:rPr lang="en-US" dirty="0"/>
-              <a:t>Try with Claude Sonnet (premium - 1x token)</a:t>
-            </a:r>
-          </a:p>
-          <a:p>
-            <a:pPr lvl="1"/>
-            <a:r>
-              <a:rPr lang="en-US" dirty="0"/>
-              <a:t>Compare results for quality, style, completeness</a:t>
-            </a:r>
-            <a:br>
-              <a:rPr lang="en-US" dirty="0"/>
-            </a:br>
-            <a:endParaRPr lang="en-US" dirty="0"/>
-          </a:p>
-          <a:p>
-            <a:pPr marL="0" indent="0">
-              <a:buNone/>
-            </a:pPr>
-            <a:r>
-              <a:rPr lang="en-US" dirty="0"/>
-              <a:t>2. </a:t>
-            </a:r>
-            <a:r>
-              <a:rPr lang="en-US" b="1" dirty="0"/>
-              <a:t>Token Usage Analysis:</a:t>
-            </a:r>
-            <a:br>
-              <a:rPr lang="en-US" dirty="0"/>
-            </a:br>
-            <a:endParaRPr lang="en-US" dirty="0"/>
-          </a:p>
-          <a:p>
-            <a:pPr lvl="1"/>
-            <a:r>
-              <a:rPr lang="en-US" dirty="0"/>
-              <a:t>Check premium token bar before and after</a:t>
-            </a:r>
-          </a:p>
-          <a:p>
-            <a:pPr lvl="1"/>
-            <a:r>
-              <a:rPr lang="en-US" dirty="0"/>
-              <a:t>Calculate tokens consumed</a:t>
-            </a:r>
-          </a:p>
-          <a:p>
-            <a:pPr lvl="1"/>
-            <a:r>
-              <a:rPr lang="en-US" dirty="0"/>
-              <a:t>Discuss: Was premium model worth the cost?</a:t>
-            </a:r>
-            <a:br>
-              <a:rPr lang="en-US" dirty="0"/>
-            </a:br>
-            <a:endParaRPr lang="en-US" dirty="0"/>
-          </a:p>
-          <a:p>
-            <a:pPr marL="0" indent="0">
-              <a:buNone/>
-            </a:pPr>
-            <a:r>
-              <a:rPr lang="en-US" dirty="0"/>
-              <a:t>3. </a:t>
-            </a:r>
-            <a:r>
-              <a:rPr lang="en-US" b="1" dirty="0"/>
-              <a:t>Best Use Cases:</a:t>
-            </a:r>
-            <a:br>
-              <a:rPr lang="en-US" dirty="0"/>
-            </a:br>
-            <a:endParaRPr lang="en-US" dirty="0"/>
-          </a:p>
-          <a:p>
-            <a:pPr lvl="1"/>
-            <a:r>
-              <a:rPr lang="en-US" dirty="0"/>
-              <a:t>Identify tasks where standard models suffice</a:t>
-            </a:r>
-          </a:p>
-          <a:p>
-            <a:pPr lvl="1"/>
-            <a:r>
-              <a:rPr lang="en-US" dirty="0"/>
-              <a:t>Identify tasks requiring premium models</a:t>
-            </a:r>
-          </a:p>
-          <a:p>
-            <a:pPr lvl="1"/>
-            <a:r>
-              <a:rPr lang="en-US" dirty="0"/>
-              <a:t>Create personal guidelines for model selection</a:t>
-            </a:r>
-            <a:br>
-              <a:rPr lang="en-US" dirty="0"/>
-            </a:br>
-            <a:endParaRPr lang="en-US" dirty="0"/>
-          </a:p>
-          <a:p>
-            <a:pPr marL="0" indent="0">
-              <a:buNone/>
-            </a:pPr>
-            <a:r>
-              <a:rPr lang="en-US" dirty="0"/>
-              <a:t>4. </a:t>
-            </a:r>
-            <a:r>
-              <a:rPr lang="en-US" b="1" dirty="0"/>
-              <a:t>Ask Mode Advantage:</a:t>
-            </a:r>
-            <a:endParaRPr lang="en-US" dirty="0"/>
-          </a:p>
-          <a:p>
-            <a:pPr lvl="1"/>
-            <a:r>
-              <a:rPr lang="en-US" dirty="0"/>
-              <a:t>Use Ask mode with premium models (no token cost)</a:t>
-            </a:r>
-          </a:p>
-          <a:p>
-            <a:pPr lvl="1"/>
-            <a:r>
-              <a:rPr lang="en-US" dirty="0"/>
-              <a:t>Compare to Agent mode token consumption</a:t>
-            </a:r>
-            <a:br>
-              <a:rPr lang="en-US" dirty="0"/>
-            </a:br>
-            <a:endParaRPr lang="en-US" dirty="0"/>
-          </a:p>
-          <a:p>
-            <a:pPr marL="0" indent="0">
-              <a:buNone/>
-            </a:pPr>
-            <a:r>
-              <a:rPr lang="en-US" b="1" dirty="0"/>
-              <a:t>Success Criteria</a:t>
-            </a:r>
-            <a:br>
-              <a:rPr lang="en-US" dirty="0"/>
-            </a:br>
-            <a:endParaRPr lang="en-US" dirty="0"/>
-          </a:p>
-          <a:p>
-            <a:pPr lvl="1"/>
-            <a:r>
-              <a:rPr lang="en-US" dirty="0"/>
-              <a:t>Compared at least 2 different models</a:t>
-            </a:r>
-          </a:p>
-          <a:p>
-            <a:pPr lvl="1"/>
-            <a:r>
-              <a:rPr lang="en-US" dirty="0"/>
-              <a:t>Understand token consumption impact</a:t>
-            </a:r>
-          </a:p>
-          <a:p>
-            <a:pPr lvl="1"/>
-            <a:r>
-              <a:rPr lang="en-US" dirty="0"/>
-              <a:t>Can make informed model selection decisions</a:t>
-            </a:r>
-            <a:br>
-              <a:rPr lang="en-US" dirty="0"/>
-            </a:br>
-            <a:endParaRPr lang="en-US" dirty="0"/>
-          </a:p>
-          <a:p>
-            <a:pPr marL="0" indent="0">
-              <a:buNone/>
-            </a:pPr>
-            <a:r>
-              <a:rPr lang="en-US" b="1" dirty="0"/>
-              <a:t>Token Economics</a:t>
-            </a:r>
-            <a:br>
-              <a:rPr lang="en-US" dirty="0"/>
-            </a:br>
-            <a:endParaRPr lang="en-US" dirty="0"/>
-          </a:p>
-          <a:p>
-            <a:pPr lvl="1"/>
-            <a:r>
-              <a:rPr lang="en-US" b="1" dirty="0"/>
-              <a:t>Standard models (unlimited):</a:t>
-            </a:r>
-            <a:r>
-              <a:rPr lang="en-US" dirty="0"/>
-              <a:t> ChatGPT-4</a:t>
-            </a:r>
-          </a:p>
-          <a:p>
-            <a:pPr lvl="1"/>
-            <a:r>
-              <a:rPr lang="en-US" b="1" dirty="0"/>
-              <a:t>Premium tokens (counted):</a:t>
-            </a:r>
-            <a:endParaRPr lang="en-US" dirty="0"/>
-          </a:p>
-          <a:p>
-            <a:pPr lvl="1"/>
-            <a:r>
-              <a:rPr lang="en-US" dirty="0"/>
-              <a:t>Claude Haiku 4.5: 1/3 token per request</a:t>
-            </a:r>
-          </a:p>
-          <a:p>
-            <a:pPr lvl="1"/>
-            <a:r>
-              <a:rPr lang="en-US" dirty="0"/>
-              <a:t>Claude Sonnet: 1x token per request</a:t>
-            </a:r>
-          </a:p>
-          <a:p>
-            <a:pPr lvl="1"/>
-            <a:r>
-              <a:rPr lang="en-US" dirty="0"/>
-              <a:t>O2 mini: 1/3 token per request</a:t>
-            </a:r>
-          </a:p>
-          <a:p>
-            <a:pPr lvl="1"/>
-            <a:r>
-              <a:rPr lang="en-US" dirty="0"/>
-              <a:t>New models: May be 10x when first released</a:t>
-            </a:r>
-          </a:p>
-          <a:p>
-            <a:endParaRPr lang="en-US" dirty="0"/>
-          </a:p>
-        </p:txBody>
-      </p:sp>
-    </p:spTree>
-    <p:extLst>
-      <p:ext uri="{BB962C8B-B14F-4D97-AF65-F5344CB8AC3E}">
-        <p14:creationId xmlns:p14="http://schemas.microsoft.com/office/powerpoint/2010/main" val="1034004045"/>
-      </p:ext>
-    </p:extLst>
-  </p:cSld>
-  <p:clrMapOvr>
-    <a:masterClrMapping/>
-  </p:clrMapOvr>
-</p:sld>
-</file>
-
-<file path=ppt/slides/slide30.xml><?xml version="1.0" encoding="utf-8"?>
-<p:sld xmlns:a="http://schemas.openxmlformats.org/drawingml/2006/main" xmlns:r="http://schemas.openxmlformats.org/officeDocument/2006/relationships" xmlns:p="http://schemas.openxmlformats.org/presentationml/2006/main">
-  <p:cSld>
-    <p:spTree>
-      <p:nvGrpSpPr>
-        <p:cNvPr id="1" name=""/>
-        <p:cNvGrpSpPr/>
-        <p:nvPr/>
-      </p:nvGrpSpPr>
-      <p:grpSpPr>
-        <a:xfrm>
-          <a:off x="0" y="0"/>
-          <a:ext cx="0" cy="0"/>
-          <a:chOff x="0" y="0"/>
-          <a:chExt cx="0" cy="0"/>
-        </a:xfrm>
-      </p:grpSpPr>
-      <p:sp>
-        <p:nvSpPr>
-          <p:cNvPr id="2" name="Title 1">
-            <a:extLst>
-              <a:ext uri="{FF2B5EF4-FFF2-40B4-BE49-F238E27FC236}">
-                <a16:creationId xmlns:a16="http://schemas.microsoft.com/office/drawing/2014/main" id="{FEC1F672-B7C0-652F-5E04-A18BAAFC1F37}"/>
-              </a:ext>
-            </a:extLst>
-          </p:cNvPr>
-          <p:cNvSpPr>
-            <a:spLocks noGrp="1"/>
-          </p:cNvSpPr>
-          <p:nvPr>
-            <p:ph type="title"/>
-          </p:nvPr>
-        </p:nvSpPr>
-        <p:spPr/>
-        <p:txBody>
-          <a:bodyPr>
-            <a:normAutofit/>
-          </a:bodyPr>
-          <a:lstStyle/>
-          <a:p>
-            <a:r>
-              <a:rPr lang="en-US" dirty="0">
-                <a:solidFill>
-                  <a:schemeClr val="bg1"/>
-                </a:solidFill>
-                <a:latin typeface="Noto Sans" panose="020B0502040504020204" pitchFamily="34" charset="0"/>
-                <a:ea typeface="Noto Sans" panose="020B0502040504020204" pitchFamily="34" charset="0"/>
-                <a:cs typeface="Noto Sans" panose="020B0502040504020204" pitchFamily="34" charset="0"/>
-              </a:rPr>
-              <a:t>Core Instruction Files &amp; Provenance Tracking</a:t>
-            </a:r>
-            <a:r>
-              <a:rPr lang="en-US" dirty="0">
-                <a:effectLst/>
-              </a:rPr>
-              <a:t> </a:t>
-            </a:r>
-            <a:endParaRPr lang="en-US" dirty="0"/>
-          </a:p>
-        </p:txBody>
-      </p:sp>
-      <p:sp>
-        <p:nvSpPr>
-          <p:cNvPr id="3" name="Content Placeholder 2">
-            <a:extLst>
-              <a:ext uri="{FF2B5EF4-FFF2-40B4-BE49-F238E27FC236}">
-                <a16:creationId xmlns:a16="http://schemas.microsoft.com/office/drawing/2014/main" id="{2C2624CA-8146-287A-2531-2442663C95E8}"/>
-              </a:ext>
-            </a:extLst>
-          </p:cNvPr>
-          <p:cNvSpPr>
-            <a:spLocks noGrp="1"/>
-          </p:cNvSpPr>
-          <p:nvPr>
-            <p:ph idx="1"/>
-          </p:nvPr>
-        </p:nvSpPr>
-        <p:spPr/>
-        <p:txBody>
-          <a:bodyPr/>
-          <a:lstStyle/>
-          <a:p>
-            <a:endParaRPr lang="en-US"/>
-          </a:p>
-        </p:txBody>
-      </p:sp>
-    </p:spTree>
-    <p:extLst>
-      <p:ext uri="{BB962C8B-B14F-4D97-AF65-F5344CB8AC3E}">
-        <p14:creationId xmlns:p14="http://schemas.microsoft.com/office/powerpoint/2010/main" val="4130626010"/>
-      </p:ext>
-    </p:extLst>
-  </p:cSld>
-  <p:clrMapOvr>
-    <a:masterClrMapping/>
-  </p:clrMapOvr>
-</p:sld>
-</file>
-
-<file path=ppt/slides/slide31.xml><?xml version="1.0" encoding="utf-8"?>
-<p:sld xmlns:a="http://schemas.openxmlformats.org/drawingml/2006/main" xmlns:r="http://schemas.openxmlformats.org/officeDocument/2006/relationships" xmlns:p="http://schemas.openxmlformats.org/presentationml/2006/main">
-  <p:cSld>
-    <p:spTree>
-      <p:nvGrpSpPr>
-        <p:cNvPr id="1" name=""/>
-        <p:cNvGrpSpPr/>
-        <p:nvPr/>
-      </p:nvGrpSpPr>
-      <p:grpSpPr>
-        <a:xfrm>
-          <a:off x="0" y="0"/>
-          <a:ext cx="0" cy="0"/>
-          <a:chOff x="0" y="0"/>
-          <a:chExt cx="0" cy="0"/>
-        </a:xfrm>
-      </p:grpSpPr>
-      <p:sp>
-        <p:nvSpPr>
-          <p:cNvPr id="2" name="Title 1">
-            <a:extLst>
-              <a:ext uri="{FF2B5EF4-FFF2-40B4-BE49-F238E27FC236}">
-                <a16:creationId xmlns:a16="http://schemas.microsoft.com/office/drawing/2014/main" id="{E262B5E3-BF9F-5842-613A-942104406700}"/>
-              </a:ext>
-            </a:extLst>
-          </p:cNvPr>
-          <p:cNvSpPr>
-            <a:spLocks noGrp="1"/>
-          </p:cNvSpPr>
-          <p:nvPr>
-            <p:ph type="title"/>
-          </p:nvPr>
-        </p:nvSpPr>
-        <p:spPr/>
-        <p:txBody>
-          <a:bodyPr>
-            <a:normAutofit/>
-          </a:bodyPr>
-          <a:lstStyle/>
-          <a:p>
-            <a:r>
-              <a:rPr lang="en-US" dirty="0">
-                <a:solidFill>
-                  <a:schemeClr val="bg1"/>
-                </a:solidFill>
-                <a:latin typeface="Noto Sans" panose="020B0502040504020204" pitchFamily="34" charset="0"/>
-                <a:ea typeface="Noto Sans" panose="020B0502040504020204" pitchFamily="34" charset="0"/>
-                <a:cs typeface="Noto Sans" panose="020B0502040504020204" pitchFamily="34" charset="0"/>
-              </a:rPr>
-              <a:t>Organizational vs. Repository Instruction Files</a:t>
-            </a:r>
-            <a:r>
-              <a:rPr lang="en-US" dirty="0">
-                <a:effectLst/>
-              </a:rPr>
-              <a:t> </a:t>
-            </a:r>
-            <a:endParaRPr lang="en-US" dirty="0"/>
-          </a:p>
-        </p:txBody>
-      </p:sp>
-      <p:sp>
-        <p:nvSpPr>
-          <p:cNvPr id="3" name="Content Placeholder 2">
-            <a:extLst>
-              <a:ext uri="{FF2B5EF4-FFF2-40B4-BE49-F238E27FC236}">
-                <a16:creationId xmlns:a16="http://schemas.microsoft.com/office/drawing/2014/main" id="{698C46CB-8A55-D8FB-3938-2F2B5B1FEBEC}"/>
-              </a:ext>
-            </a:extLst>
-          </p:cNvPr>
-          <p:cNvSpPr>
-            <a:spLocks noGrp="1"/>
-          </p:cNvSpPr>
-          <p:nvPr>
-            <p:ph idx="1"/>
-          </p:nvPr>
-        </p:nvSpPr>
-        <p:spPr/>
-        <p:txBody>
-          <a:bodyPr/>
-          <a:lstStyle/>
-          <a:p>
-            <a:endParaRPr lang="en-US"/>
-          </a:p>
-        </p:txBody>
-      </p:sp>
-    </p:spTree>
-    <p:extLst>
-      <p:ext uri="{BB962C8B-B14F-4D97-AF65-F5344CB8AC3E}">
-        <p14:creationId xmlns:p14="http://schemas.microsoft.com/office/powerpoint/2010/main" val="4172163112"/>
-      </p:ext>
-    </p:extLst>
-  </p:cSld>
-  <p:clrMapOvr>
-    <a:masterClrMapping/>
-  </p:clrMapOvr>
-</p:sld>
-</file>
-
-<file path=ppt/slides/slide32.xml><?xml version="1.0" encoding="utf-8"?>
-<p:sld xmlns:a="http://schemas.openxmlformats.org/drawingml/2006/main" xmlns:r="http://schemas.openxmlformats.org/officeDocument/2006/relationships" xmlns:p="http://schemas.openxmlformats.org/presentationml/2006/main">
-  <p:cSld>
-    <p:spTree>
-      <p:nvGrpSpPr>
-        <p:cNvPr id="1" name=""/>
-        <p:cNvGrpSpPr/>
-        <p:nvPr/>
-      </p:nvGrpSpPr>
-      <p:grpSpPr>
-        <a:xfrm>
-          <a:off x="0" y="0"/>
-          <a:ext cx="0" cy="0"/>
-          <a:chOff x="0" y="0"/>
-          <a:chExt cx="0" cy="0"/>
-        </a:xfrm>
-      </p:grpSpPr>
-      <p:sp>
-        <p:nvSpPr>
-          <p:cNvPr id="2" name="Title 1">
-            <a:extLst>
-              <a:ext uri="{FF2B5EF4-FFF2-40B4-BE49-F238E27FC236}">
-                <a16:creationId xmlns:a16="http://schemas.microsoft.com/office/drawing/2014/main" id="{5684AE35-FB97-87B8-D43C-076CFF1B6412}"/>
-              </a:ext>
-            </a:extLst>
-          </p:cNvPr>
-          <p:cNvSpPr>
-            <a:spLocks noGrp="1"/>
-          </p:cNvSpPr>
-          <p:nvPr>
-            <p:ph type="title"/>
-          </p:nvPr>
-        </p:nvSpPr>
-        <p:spPr/>
-        <p:txBody>
-          <a:bodyPr>
-            <a:normAutofit/>
-          </a:bodyPr>
-          <a:lstStyle/>
-          <a:p>
-            <a:r>
-              <a:rPr lang="en-US" dirty="0">
-                <a:solidFill>
-                  <a:schemeClr val="bg1"/>
-                </a:solidFill>
-                <a:latin typeface="Noto Sans" panose="020B0502040504020204" pitchFamily="34" charset="0"/>
-                <a:ea typeface="Noto Sans" panose="020B0502040504020204" pitchFamily="34" charset="0"/>
-                <a:cs typeface="Noto Sans" panose="020B0502040504020204" pitchFamily="34" charset="0"/>
-              </a:rPr>
-              <a:t>Exercise: Technology Inventory &amp; Instruction Generation</a:t>
-            </a:r>
-            <a:r>
-              <a:rPr lang="en-US" dirty="0">
-                <a:effectLst/>
-              </a:rPr>
-              <a:t> </a:t>
-            </a:r>
-            <a:endParaRPr lang="en-US" dirty="0"/>
-          </a:p>
-        </p:txBody>
-      </p:sp>
-      <p:sp>
-        <p:nvSpPr>
-          <p:cNvPr id="3" name="Content Placeholder 2">
-            <a:extLst>
-              <a:ext uri="{FF2B5EF4-FFF2-40B4-BE49-F238E27FC236}">
-                <a16:creationId xmlns:a16="http://schemas.microsoft.com/office/drawing/2014/main" id="{B72B83CA-D1A0-0FFA-5BEF-2BC7D776DCAC}"/>
-              </a:ext>
-            </a:extLst>
-          </p:cNvPr>
-          <p:cNvSpPr>
-            <a:spLocks noGrp="1"/>
-          </p:cNvSpPr>
-          <p:nvPr>
-            <p:ph idx="1"/>
-          </p:nvPr>
-        </p:nvSpPr>
-        <p:spPr/>
-        <p:txBody>
-          <a:bodyPr/>
-          <a:lstStyle/>
-          <a:p>
-            <a:endParaRPr lang="en-US"/>
-          </a:p>
-        </p:txBody>
-      </p:sp>
-    </p:spTree>
-    <p:extLst>
-      <p:ext uri="{BB962C8B-B14F-4D97-AF65-F5344CB8AC3E}">
-        <p14:creationId xmlns:p14="http://schemas.microsoft.com/office/powerpoint/2010/main" val="392814588"/>
-      </p:ext>
-    </p:extLst>
-  </p:cSld>
-  <p:clrMapOvr>
-    <a:masterClrMapping/>
-  </p:clrMapOvr>
-</p:sld>
-</file>
-
-<file path=ppt/slides/slide33.xml><?xml version="1.0" encoding="utf-8"?>
-<p:sld xmlns:a="http://schemas.openxmlformats.org/drawingml/2006/main" xmlns:r="http://schemas.openxmlformats.org/officeDocument/2006/relationships" xmlns:p="http://schemas.openxmlformats.org/presentationml/2006/main">
-  <p:cSld>
-    <p:spTree>
-      <p:nvGrpSpPr>
-        <p:cNvPr id="1" name=""/>
-        <p:cNvGrpSpPr/>
-        <p:nvPr/>
-      </p:nvGrpSpPr>
-      <p:grpSpPr>
-        <a:xfrm>
-          <a:off x="0" y="0"/>
-          <a:ext cx="0" cy="0"/>
-          <a:chOff x="0" y="0"/>
-          <a:chExt cx="0" cy="0"/>
-        </a:xfrm>
-      </p:grpSpPr>
-      <p:sp>
-        <p:nvSpPr>
-          <p:cNvPr id="2" name="Title 1">
-            <a:extLst>
-              <a:ext uri="{FF2B5EF4-FFF2-40B4-BE49-F238E27FC236}">
-                <a16:creationId xmlns:a16="http://schemas.microsoft.com/office/drawing/2014/main" id="{4465A81D-98B7-2773-2967-81EC9516F72B}"/>
-              </a:ext>
-            </a:extLst>
-          </p:cNvPr>
-          <p:cNvSpPr>
-            <a:spLocks noGrp="1"/>
-          </p:cNvSpPr>
-          <p:nvPr>
-            <p:ph type="title"/>
-          </p:nvPr>
-        </p:nvSpPr>
-        <p:spPr/>
-        <p:txBody>
-          <a:bodyPr>
-            <a:normAutofit/>
-          </a:bodyPr>
-          <a:lstStyle/>
-          <a:p>
-            <a:r>
-              <a:rPr lang="en-US" dirty="0">
-                <a:solidFill>
-                  <a:schemeClr val="bg1"/>
-                </a:solidFill>
-                <a:latin typeface="Noto Sans" panose="020B0502040504020204" pitchFamily="34" charset="0"/>
-                <a:ea typeface="Noto Sans" panose="020B0502040504020204" pitchFamily="34" charset="0"/>
-                <a:cs typeface="Noto Sans" panose="020B0502040504020204" pitchFamily="34" charset="0"/>
-              </a:rPr>
-              <a:t>Copilot Instruction Files and Context Management</a:t>
-            </a:r>
-            <a:r>
-              <a:rPr lang="en-US" dirty="0">
-                <a:effectLst/>
-              </a:rPr>
-              <a:t> </a:t>
-            </a:r>
-            <a:endParaRPr lang="en-US" dirty="0"/>
-          </a:p>
-        </p:txBody>
-      </p:sp>
-      <p:sp>
-        <p:nvSpPr>
-          <p:cNvPr id="3" name="Content Placeholder 2">
-            <a:extLst>
-              <a:ext uri="{FF2B5EF4-FFF2-40B4-BE49-F238E27FC236}">
-                <a16:creationId xmlns:a16="http://schemas.microsoft.com/office/drawing/2014/main" id="{28E5900E-93FF-04B2-EE30-646FDDD4BCD7}"/>
-              </a:ext>
-            </a:extLst>
-          </p:cNvPr>
-          <p:cNvSpPr>
-            <a:spLocks noGrp="1"/>
-          </p:cNvSpPr>
-          <p:nvPr>
-            <p:ph idx="1"/>
-          </p:nvPr>
-        </p:nvSpPr>
-        <p:spPr/>
-        <p:txBody>
-          <a:bodyPr/>
-          <a:lstStyle/>
-          <a:p>
-            <a:endParaRPr lang="en-US"/>
-          </a:p>
-        </p:txBody>
-      </p:sp>
-    </p:spTree>
-    <p:extLst>
-      <p:ext uri="{BB962C8B-B14F-4D97-AF65-F5344CB8AC3E}">
-        <p14:creationId xmlns:p14="http://schemas.microsoft.com/office/powerpoint/2010/main" val="820638195"/>
-      </p:ext>
-    </p:extLst>
-  </p:cSld>
-  <p:clrMapOvr>
-    <a:masterClrMapping/>
-  </p:clrMapOvr>
-</p:sld>
-</file>
-
-<file path=ppt/slides/slide34.xml><?xml version="1.0" encoding="utf-8"?>
-<p:sld xmlns:a="http://schemas.openxmlformats.org/drawingml/2006/main" xmlns:r="http://schemas.openxmlformats.org/officeDocument/2006/relationships" xmlns:p="http://schemas.openxmlformats.org/presentationml/2006/main">
-  <p:cSld>
-    <p:spTree>
-      <p:nvGrpSpPr>
-        <p:cNvPr id="1" name=""/>
-        <p:cNvGrpSpPr/>
-        <p:nvPr/>
-      </p:nvGrpSpPr>
-      <p:grpSpPr>
-        <a:xfrm>
-          <a:off x="0" y="0"/>
-          <a:ext cx="0" cy="0"/>
-          <a:chOff x="0" y="0"/>
-          <a:chExt cx="0" cy="0"/>
-        </a:xfrm>
-      </p:grpSpPr>
-      <p:sp>
-        <p:nvSpPr>
-          <p:cNvPr id="2" name="Title 1">
-            <a:extLst>
-              <a:ext uri="{FF2B5EF4-FFF2-40B4-BE49-F238E27FC236}">
-                <a16:creationId xmlns:a16="http://schemas.microsoft.com/office/drawing/2014/main" id="{400C511F-CA2A-9FFD-9023-9F96010CFB17}"/>
-              </a:ext>
-            </a:extLst>
-          </p:cNvPr>
-          <p:cNvSpPr>
-            <a:spLocks noGrp="1"/>
-          </p:cNvSpPr>
-          <p:nvPr>
-            <p:ph type="title"/>
-          </p:nvPr>
-        </p:nvSpPr>
-        <p:spPr/>
-        <p:txBody>
-          <a:bodyPr>
-            <a:normAutofit/>
-          </a:bodyPr>
-          <a:lstStyle/>
-          <a:p>
-            <a:r>
-              <a:rPr lang="en-US" dirty="0">
-                <a:solidFill>
-                  <a:schemeClr val="bg1"/>
-                </a:solidFill>
-                <a:latin typeface="Noto Sans" panose="020B0502040504020204" pitchFamily="34" charset="0"/>
-                <a:ea typeface="Noto Sans" panose="020B0502040504020204" pitchFamily="34" charset="0"/>
-                <a:cs typeface="Noto Sans" panose="020B0502040504020204" pitchFamily="34" charset="0"/>
-              </a:rPr>
-              <a:t>Creating Instruction Files with Sessions</a:t>
-            </a:r>
-            <a:r>
-              <a:rPr lang="en-US" dirty="0">
-                <a:effectLst/>
-              </a:rPr>
-              <a:t> </a:t>
-            </a:r>
-            <a:endParaRPr lang="en-US" dirty="0"/>
-          </a:p>
-        </p:txBody>
-      </p:sp>
-      <p:sp>
-        <p:nvSpPr>
-          <p:cNvPr id="3" name="Content Placeholder 2">
-            <a:extLst>
-              <a:ext uri="{FF2B5EF4-FFF2-40B4-BE49-F238E27FC236}">
-                <a16:creationId xmlns:a16="http://schemas.microsoft.com/office/drawing/2014/main" id="{1CF43F7B-F6B9-7717-1B57-4846508B523D}"/>
-              </a:ext>
-            </a:extLst>
-          </p:cNvPr>
-          <p:cNvSpPr>
-            <a:spLocks noGrp="1"/>
-          </p:cNvSpPr>
-          <p:nvPr>
-            <p:ph idx="1"/>
-          </p:nvPr>
-        </p:nvSpPr>
-        <p:spPr/>
-        <p:txBody>
-          <a:bodyPr/>
-          <a:lstStyle/>
-          <a:p>
-            <a:endParaRPr lang="en-US"/>
-          </a:p>
-        </p:txBody>
-      </p:sp>
-    </p:spTree>
-    <p:extLst>
-      <p:ext uri="{BB962C8B-B14F-4D97-AF65-F5344CB8AC3E}">
-        <p14:creationId xmlns:p14="http://schemas.microsoft.com/office/powerpoint/2010/main" val="1505076037"/>
-      </p:ext>
-    </p:extLst>
-  </p:cSld>
-  <p:clrMapOvr>
-    <a:masterClrMapping/>
-  </p:clrMapOvr>
-</p:sld>
-</file>
-
-<file path=ppt/slides/slide35.xml><?xml version="1.0" encoding="utf-8"?>
-<p:sld xmlns:a="http://schemas.openxmlformats.org/drawingml/2006/main" xmlns:r="http://schemas.openxmlformats.org/officeDocument/2006/relationships" xmlns:p="http://schemas.openxmlformats.org/presentationml/2006/main">
-  <p:cSld>
-    <p:spTree>
-      <p:nvGrpSpPr>
-        <p:cNvPr id="1" name=""/>
-        <p:cNvGrpSpPr/>
-        <p:nvPr/>
-      </p:nvGrpSpPr>
-      <p:grpSpPr>
-        <a:xfrm>
-          <a:off x="0" y="0"/>
-          <a:ext cx="0" cy="0"/>
-          <a:chOff x="0" y="0"/>
-          <a:chExt cx="0" cy="0"/>
-        </a:xfrm>
-      </p:grpSpPr>
-      <p:sp>
-        <p:nvSpPr>
-          <p:cNvPr id="2" name="Title 1">
-            <a:extLst>
-              <a:ext uri="{FF2B5EF4-FFF2-40B4-BE49-F238E27FC236}">
-                <a16:creationId xmlns:a16="http://schemas.microsoft.com/office/drawing/2014/main" id="{56A02BBD-9E55-03DB-9A57-B2204111CE65}"/>
-              </a:ext>
-            </a:extLst>
-          </p:cNvPr>
-          <p:cNvSpPr>
-            <a:spLocks noGrp="1"/>
-          </p:cNvSpPr>
-          <p:nvPr>
-            <p:ph type="title"/>
-          </p:nvPr>
-        </p:nvSpPr>
-        <p:spPr/>
-        <p:txBody>
-          <a:bodyPr>
-            <a:normAutofit/>
-          </a:bodyPr>
-          <a:lstStyle/>
-          <a:p>
-            <a:r>
-              <a:rPr lang="en-US" dirty="0">
-                <a:solidFill>
-                  <a:schemeClr val="bg1"/>
-                </a:solidFill>
-                <a:latin typeface="Noto Sans" panose="020B0502040504020204" pitchFamily="34" charset="0"/>
-                <a:ea typeface="Noto Sans" panose="020B0502040504020204" pitchFamily="34" charset="0"/>
-                <a:cs typeface="Noto Sans" panose="020B0502040504020204" pitchFamily="34" charset="0"/>
-              </a:rPr>
-              <a:t>Managing Instruction Files &amp; Context Windows</a:t>
-            </a:r>
-            <a:r>
-              <a:rPr lang="en-US" dirty="0">
-                <a:effectLst/>
-              </a:rPr>
-              <a:t> </a:t>
-            </a:r>
-            <a:endParaRPr lang="en-US" dirty="0"/>
-          </a:p>
-        </p:txBody>
-      </p:sp>
-      <p:sp>
-        <p:nvSpPr>
-          <p:cNvPr id="3" name="Content Placeholder 2">
-            <a:extLst>
-              <a:ext uri="{FF2B5EF4-FFF2-40B4-BE49-F238E27FC236}">
-                <a16:creationId xmlns:a16="http://schemas.microsoft.com/office/drawing/2014/main" id="{4546340E-7981-BA43-8B85-1362C6A8AB73}"/>
-              </a:ext>
-            </a:extLst>
-          </p:cNvPr>
-          <p:cNvSpPr>
-            <a:spLocks noGrp="1"/>
-          </p:cNvSpPr>
-          <p:nvPr>
-            <p:ph idx="1"/>
-          </p:nvPr>
-        </p:nvSpPr>
-        <p:spPr/>
-        <p:txBody>
-          <a:bodyPr/>
-          <a:lstStyle/>
-          <a:p>
-            <a:pPr lvl="1"/>
-            <a:endParaRPr lang="en-US"/>
-          </a:p>
-          <a:p>
-            <a:pPr lvl="1"/>
-            <a:endParaRPr lang="en-US"/>
-          </a:p>
-          <a:p>
-            <a:pPr lvl="1"/>
-            <a:endParaRPr lang="en-US"/>
-          </a:p>
-          <a:p>
-            <a:pPr lvl="1"/>
-            <a:endParaRPr lang="en-US"/>
-          </a:p>
-          <a:p>
-            <a:pPr lvl="1"/>
-            <a:endParaRPr lang="en-US"/>
-          </a:p>
-          <a:p>
-            <a:pPr lvl="1"/>
-            <a:endParaRPr lang="en-US"/>
-          </a:p>
-          <a:p>
-            <a:pPr lvl="1"/>
-            <a:endParaRPr lang="en-US"/>
-          </a:p>
-          <a:p>
-            <a:pPr lvl="1"/>
-            <a:endParaRPr lang="en-US"/>
-          </a:p>
-          <a:p>
-            <a:endParaRPr lang="en-US"/>
-          </a:p>
-        </p:txBody>
-      </p:sp>
-    </p:spTree>
-    <p:extLst>
-      <p:ext uri="{BB962C8B-B14F-4D97-AF65-F5344CB8AC3E}">
-        <p14:creationId xmlns:p14="http://schemas.microsoft.com/office/powerpoint/2010/main" val="3955306340"/>
-      </p:ext>
-    </p:extLst>
-  </p:cSld>
-  <p:clrMapOvr>
-    <a:masterClrMapping/>
-  </p:clrMapOvr>
-</p:sld>
-</file>
-
-<file path=ppt/slides/slide4.xml><?xml version="1.0" encoding="utf-8"?>
 <p:sld xmlns:a="http://schemas.openxmlformats.org/drawingml/2006/main" xmlns:r="http://schemas.openxmlformats.org/officeDocument/2006/relationships" xmlns:p="http://schemas.openxmlformats.org/presentationml/2006/main">
   <p:cSld>
     <p:spTree>
@@ -9895,7 +8314,7 @@
 </p:sld>
 </file>
 
-<file path=ppt/slides/slide5.xml><?xml version="1.0" encoding="utf-8"?>
+<file path=ppt/slides/slide4.xml><?xml version="1.0" encoding="utf-8"?>
 <p:sld xmlns:a="http://schemas.openxmlformats.org/drawingml/2006/main" xmlns:r="http://schemas.openxmlformats.org/officeDocument/2006/relationships" xmlns:p="http://schemas.openxmlformats.org/presentationml/2006/main">
   <p:cSld>
     <p:spTree>
@@ -10129,7 +8548,7 @@
 </p:sld>
 </file>
 
-<file path=ppt/slides/slide6.xml><?xml version="1.0" encoding="utf-8"?>
+<file path=ppt/slides/slide5.xml><?xml version="1.0" encoding="utf-8"?>
 <p:sld xmlns:a="http://schemas.openxmlformats.org/drawingml/2006/main" xmlns:r="http://schemas.openxmlformats.org/officeDocument/2006/relationships" xmlns:p="http://schemas.openxmlformats.org/presentationml/2006/main">
   <p:cSld>
     <p:spTree>
@@ -10346,7 +8765,7 @@
 </p:sld>
 </file>
 
-<file path=ppt/slides/slide7.xml><?xml version="1.0" encoding="utf-8"?>
+<file path=ppt/slides/slide6.xml><?xml version="1.0" encoding="utf-8"?>
 <p:sld xmlns:a="http://schemas.openxmlformats.org/drawingml/2006/main" xmlns:r="http://schemas.openxmlformats.org/officeDocument/2006/relationships" xmlns:p="http://schemas.openxmlformats.org/presentationml/2006/main">
   <p:cSld>
     <p:spTree>
@@ -10590,7 +9009,7 @@
 </p:sld>
 </file>
 
-<file path=ppt/slides/slide8.xml><?xml version="1.0" encoding="utf-8"?>
+<file path=ppt/slides/slide7.xml><?xml version="1.0" encoding="utf-8"?>
 <p:sld xmlns:a="http://schemas.openxmlformats.org/drawingml/2006/main" xmlns:r="http://schemas.openxmlformats.org/officeDocument/2006/relationships" xmlns:p="http://schemas.openxmlformats.org/presentationml/2006/main">
   <p:cSld>
     <p:spTree>
@@ -10815,7 +9234,7 @@
 </p:sld>
 </file>
 
-<file path=ppt/slides/slide9.xml><?xml version="1.0" encoding="utf-8"?>
+<file path=ppt/slides/slide8.xml><?xml version="1.0" encoding="utf-8"?>
 <p:sld xmlns:a="http://schemas.openxmlformats.org/drawingml/2006/main" xmlns:r="http://schemas.openxmlformats.org/officeDocument/2006/relationships" xmlns:p="http://schemas.openxmlformats.org/presentationml/2006/main">
   <p:cSld>
     <p:spTree>
@@ -11039,6 +9458,245 @@
     <p:extLst>
       <p:ext uri="{BB962C8B-B14F-4D97-AF65-F5344CB8AC3E}">
         <p14:creationId xmlns:p14="http://schemas.microsoft.com/office/powerpoint/2010/main" val="445129214"/>
+      </p:ext>
+    </p:extLst>
+  </p:cSld>
+  <p:clrMapOvr>
+    <a:masterClrMapping/>
+  </p:clrMapOvr>
+</p:sld>
+</file>
+
+<file path=ppt/slides/slide9.xml><?xml version="1.0" encoding="utf-8"?>
+<p:sld xmlns:a="http://schemas.openxmlformats.org/drawingml/2006/main" xmlns:r="http://schemas.openxmlformats.org/officeDocument/2006/relationships" xmlns:p="http://schemas.openxmlformats.org/presentationml/2006/main">
+  <p:cSld>
+    <p:spTree>
+      <p:nvGrpSpPr>
+        <p:cNvPr id="1" name="">
+          <a:extLst>
+            <a:ext uri="{FF2B5EF4-FFF2-40B4-BE49-F238E27FC236}">
+              <a16:creationId xmlns:a16="http://schemas.microsoft.com/office/drawing/2014/main" id="{B0CB07D7-96D7-6DFB-9862-570F8D7DDF0D}"/>
+            </a:ext>
+          </a:extLst>
+        </p:cNvPr>
+        <p:cNvGrpSpPr/>
+        <p:nvPr/>
+      </p:nvGrpSpPr>
+      <p:grpSpPr>
+        <a:xfrm>
+          <a:off x="0" y="0"/>
+          <a:ext cx="0" cy="0"/>
+          <a:chOff x="0" y="0"/>
+          <a:chExt cx="0" cy="0"/>
+        </a:xfrm>
+      </p:grpSpPr>
+      <p:sp>
+        <p:nvSpPr>
+          <p:cNvPr id="2" name="Title 1">
+            <a:extLst>
+              <a:ext uri="{FF2B5EF4-FFF2-40B4-BE49-F238E27FC236}">
+                <a16:creationId xmlns:a16="http://schemas.microsoft.com/office/drawing/2014/main" id="{80F6FBCD-8460-327A-453B-23ED964EE34F}"/>
+              </a:ext>
+            </a:extLst>
+          </p:cNvPr>
+          <p:cNvSpPr>
+            <a:spLocks noGrp="1"/>
+          </p:cNvSpPr>
+          <p:nvPr>
+            <p:ph type="title"/>
+          </p:nvPr>
+        </p:nvSpPr>
+        <p:spPr/>
+        <p:txBody>
+          <a:bodyPr>
+            <a:noAutofit/>
+          </a:bodyPr>
+          <a:lstStyle/>
+          <a:p>
+            <a:r>
+              <a:rPr lang="en-US" sz="2400" dirty="0"/>
+              <a:t>Exercise: Calculator Project – Add Trigonometric Functions </a:t>
+            </a:r>
+          </a:p>
+        </p:txBody>
+      </p:sp>
+      <p:sp>
+        <p:nvSpPr>
+          <p:cNvPr id="3" name="Content Placeholder 2">
+            <a:extLst>
+              <a:ext uri="{FF2B5EF4-FFF2-40B4-BE49-F238E27FC236}">
+                <a16:creationId xmlns:a16="http://schemas.microsoft.com/office/drawing/2014/main" id="{27F32117-34FF-0A09-5AA2-44249A520062}"/>
+              </a:ext>
+            </a:extLst>
+          </p:cNvPr>
+          <p:cNvSpPr>
+            <a:spLocks noGrp="1"/>
+          </p:cNvSpPr>
+          <p:nvPr>
+            <p:ph idx="1"/>
+          </p:nvPr>
+        </p:nvSpPr>
+        <p:spPr/>
+        <p:txBody>
+          <a:bodyPr numCol="2">
+            <a:normAutofit fontScale="70000" lnSpcReduction="20000"/>
+          </a:bodyPr>
+          <a:lstStyle/>
+          <a:p>
+            <a:pPr marL="0" indent="0">
+              <a:buNone/>
+            </a:pPr>
+            <a:r>
+              <a:rPr lang="en-US" b="1" dirty="0"/>
+              <a:t>Duration: 15 minutes</a:t>
+            </a:r>
+            <a:endParaRPr lang="en-US" dirty="0"/>
+          </a:p>
+          <a:p>
+            <a:pPr marL="0" indent="0">
+              <a:buNone/>
+            </a:pPr>
+            <a:br>
+              <a:rPr lang="en-US" b="1" dirty="0"/>
+            </a:br>
+            <a:r>
+              <a:rPr lang="en-US" b="1" dirty="0"/>
+              <a:t>Objectives</a:t>
+            </a:r>
+            <a:br>
+              <a:rPr lang="en-US" dirty="0"/>
+            </a:br>
+            <a:endParaRPr lang="en-US" dirty="0"/>
+          </a:p>
+          <a:p>
+            <a:pPr lvl="1"/>
+            <a:r>
+              <a:rPr lang="en-US" dirty="0"/>
+              <a:t>Integrate trigonometric functions into the calculator’s operation set</a:t>
+            </a:r>
+          </a:p>
+          <a:p>
+            <a:pPr lvl="1"/>
+            <a:r>
+              <a:rPr lang="en-US" dirty="0"/>
+              <a:t>Use AI to generate math‑library wrappers and input‑parsing logic</a:t>
+            </a:r>
+          </a:p>
+          <a:p>
+            <a:pPr lvl="1"/>
+            <a:r>
+              <a:rPr lang="en-US" dirty="0"/>
+              <a:t>Ensure correct handling of degrees vs. radians</a:t>
+            </a:r>
+          </a:p>
+          <a:p>
+            <a:pPr marL="0" indent="0">
+              <a:buNone/>
+            </a:pPr>
+            <a:br>
+              <a:rPr lang="en-US" dirty="0"/>
+            </a:br>
+            <a:r>
+              <a:rPr lang="en-US" b="1" dirty="0"/>
+              <a:t>Activities</a:t>
+            </a:r>
+            <a:br>
+              <a:rPr lang="en-US" dirty="0"/>
+            </a:br>
+            <a:endParaRPr lang="en-US" dirty="0"/>
+          </a:p>
+          <a:p>
+            <a:pPr marL="609585" indent="-609585">
+              <a:buAutoNum type="arabicPeriod"/>
+            </a:pPr>
+            <a:r>
+              <a:rPr lang="en-US" dirty="0"/>
+              <a:t>Ask AI to generate functions for sin, cos, and tan using your language’s math library</a:t>
+            </a:r>
+          </a:p>
+          <a:p>
+            <a:pPr marL="609585" indent="-609585">
+              <a:buAutoNum type="arabicPeriod"/>
+            </a:pPr>
+            <a:r>
+              <a:rPr lang="en-US" dirty="0"/>
+              <a:t>Prompt AI to propose a strategy for handling degree/radian mode</a:t>
+            </a:r>
+          </a:p>
+          <a:p>
+            <a:pPr marL="609585" indent="-609585">
+              <a:buAutoNum type="arabicPeriod"/>
+            </a:pPr>
+            <a:r>
+              <a:rPr lang="en-US" dirty="0"/>
+              <a:t>Implement UI bindings or command triggers for each trig function</a:t>
+            </a:r>
+          </a:p>
+          <a:p>
+            <a:pPr marL="609585" indent="-609585">
+              <a:buAutoNum type="arabicPeriod"/>
+            </a:pPr>
+            <a:r>
+              <a:rPr lang="en-US" dirty="0"/>
+              <a:t>Use AI to generate a table of sample inputs and expected outputs</a:t>
+            </a:r>
+          </a:p>
+          <a:p>
+            <a:pPr marL="457189" lvl="1" indent="0">
+              <a:buNone/>
+            </a:pPr>
+            <a:endParaRPr lang="en-US" dirty="0"/>
+          </a:p>
+          <a:p>
+            <a:pPr marL="0" indent="0">
+              <a:buNone/>
+            </a:pPr>
+            <a:r>
+              <a:rPr lang="en-US" b="1" dirty="0"/>
+              <a:t>Success Criteria</a:t>
+            </a:r>
+            <a:endParaRPr lang="en-US" dirty="0"/>
+          </a:p>
+          <a:p>
+            <a:pPr lvl="1"/>
+            <a:r>
+              <a:rPr lang="en-US" dirty="0"/>
+              <a:t>Trig functions compute correct values in the selected angle mode</a:t>
+            </a:r>
+          </a:p>
+          <a:p>
+            <a:pPr lvl="1"/>
+            <a:r>
+              <a:rPr lang="en-US" dirty="0"/>
+              <a:t>Degree/radian mode switching works consistently</a:t>
+            </a:r>
+          </a:p>
+          <a:p>
+            <a:pPr lvl="1"/>
+            <a:r>
+              <a:rPr lang="en-US" dirty="0"/>
+              <a:t>UI or command triggers correctly call the trig functions</a:t>
+            </a:r>
+          </a:p>
+          <a:p>
+            <a:pPr lvl="1"/>
+            <a:r>
+              <a:rPr lang="en-US" dirty="0"/>
+              <a:t>Learner can explain how AI‑generated code was validated and refine</a:t>
+            </a:r>
+          </a:p>
+          <a:p>
+            <a:pPr marL="0" indent="0">
+              <a:buNone/>
+            </a:pPr>
+            <a:endParaRPr lang="en-US" dirty="0"/>
+          </a:p>
+        </p:txBody>
+      </p:sp>
+    </p:spTree>
+    <p:extLst>
+      <p:ext uri="{BB962C8B-B14F-4D97-AF65-F5344CB8AC3E}">
+        <p14:creationId xmlns:p14="http://schemas.microsoft.com/office/powerpoint/2010/main" val="1899882474"/>
       </p:ext>
     </p:extLst>
   </p:cSld>
